--- a/figures/fig4.pptx
+++ b/figures/fig4.pptx
@@ -5,19 +5,20 @@
     <p:sldMasterId id="2147483648" r:id="rId1"/>
   </p:sldMasterIdLst>
   <p:notesMasterIdLst>
-    <p:notesMasterId r:id="rId7"/>
+    <p:notesMasterId r:id="rId8"/>
   </p:notesMasterIdLst>
   <p:sldIdLst>
     <p:sldId id="256" r:id="rId2"/>
-    <p:sldId id="257" r:id="rId3"/>
-    <p:sldId id="260" r:id="rId4"/>
-    <p:sldId id="258" r:id="rId5"/>
-    <p:sldId id="259" r:id="rId6"/>
+    <p:sldId id="261" r:id="rId3"/>
+    <p:sldId id="257" r:id="rId4"/>
+    <p:sldId id="260" r:id="rId5"/>
+    <p:sldId id="258" r:id="rId6"/>
+    <p:sldId id="259" r:id="rId7"/>
   </p:sldIdLst>
   <p:sldSz cx="12599988" cy="8640763"/>
   <p:notesSz cx="6858000" cy="9144000"/>
   <p:custDataLst>
-    <p:tags r:id="rId8"/>
+    <p:tags r:id="rId9"/>
   </p:custDataLst>
   <p:defaultTextStyle>
     <a:defPPr>
@@ -215,7 +216,7 @@
           <a:p>
             <a:fld id="{A21AE48D-D7D9-46F8-80AC-255986AD24D4}" type="datetimeFigureOut">
               <a:rPr lang="fr-FR" smtClean="0"/>
-              <a:t>27/06/2025</a:t>
+              <a:t>27/10/2025</a:t>
             </a:fld>
             <a:endParaRPr lang="fr-FR"/>
           </a:p>
@@ -547,7 +548,7 @@
           <a:p>
             <a:fld id="{DB1E9922-CB52-49F7-BA04-8363A23E0C72}" type="slidenum">
               <a:rPr lang="fr-FR" smtClean="0"/>
-              <a:t>2</a:t>
+              <a:t>3</a:t>
             </a:fld>
             <a:endParaRPr lang="fr-FR"/>
           </a:p>
@@ -631,7 +632,7 @@
           <a:p>
             <a:fld id="{DB1E9922-CB52-49F7-BA04-8363A23E0C72}" type="slidenum">
               <a:rPr lang="fr-FR" smtClean="0"/>
-              <a:t>3</a:t>
+              <a:t>4</a:t>
             </a:fld>
             <a:endParaRPr lang="fr-FR"/>
           </a:p>
@@ -831,7 +832,7 @@
           <a:p>
             <a:fld id="{E6744CE3-0875-4B69-89C0-6F72D8139561}" type="datetimeFigureOut">
               <a:rPr lang="en-GB" smtClean="0"/>
-              <a:t>27/06/2025</a:t>
+              <a:t>27/10/2025</a:t>
             </a:fld>
             <a:endParaRPr lang="en-GB"/>
           </a:p>
@@ -1001,7 +1002,7 @@
           <a:p>
             <a:fld id="{E6744CE3-0875-4B69-89C0-6F72D8139561}" type="datetimeFigureOut">
               <a:rPr lang="en-GB" smtClean="0"/>
-              <a:t>27/06/2025</a:t>
+              <a:t>27/10/2025</a:t>
             </a:fld>
             <a:endParaRPr lang="en-GB"/>
           </a:p>
@@ -1247,7 +1248,7 @@
           <a:p>
             <a:fld id="{E6744CE3-0875-4B69-89C0-6F72D8139561}" type="datetimeFigureOut">
               <a:rPr lang="en-GB" smtClean="0"/>
-              <a:t>27/06/2025</a:t>
+              <a:t>27/10/2025</a:t>
             </a:fld>
             <a:endParaRPr lang="en-GB"/>
           </a:p>
@@ -1535,7 +1536,7 @@
           <a:p>
             <a:fld id="{E6744CE3-0875-4B69-89C0-6F72D8139561}" type="datetimeFigureOut">
               <a:rPr lang="en-GB" smtClean="0"/>
-              <a:t>27/06/2025</a:t>
+              <a:t>27/10/2025</a:t>
             </a:fld>
             <a:endParaRPr lang="en-GB"/>
           </a:p>
@@ -1957,7 +1958,7 @@
           <a:p>
             <a:fld id="{E6744CE3-0875-4B69-89C0-6F72D8139561}" type="datetimeFigureOut">
               <a:rPr lang="en-GB" smtClean="0"/>
-              <a:t>27/06/2025</a:t>
+              <a:t>27/10/2025</a:t>
             </a:fld>
             <a:endParaRPr lang="en-GB"/>
           </a:p>
@@ -2075,7 +2076,7 @@
           <a:p>
             <a:fld id="{E6744CE3-0875-4B69-89C0-6F72D8139561}" type="datetimeFigureOut">
               <a:rPr lang="en-GB" smtClean="0"/>
-              <a:t>27/06/2025</a:t>
+              <a:t>27/10/2025</a:t>
             </a:fld>
             <a:endParaRPr lang="en-GB"/>
           </a:p>
@@ -2170,7 +2171,7 @@
           <a:p>
             <a:fld id="{E6744CE3-0875-4B69-89C0-6F72D8139561}" type="datetimeFigureOut">
               <a:rPr lang="en-GB" smtClean="0"/>
-              <a:t>27/06/2025</a:t>
+              <a:t>27/10/2025</a:t>
             </a:fld>
             <a:endParaRPr lang="en-GB"/>
           </a:p>
@@ -2383,7 +2384,7 @@
           <a:p>
             <a:fld id="{E6744CE3-0875-4B69-89C0-6F72D8139561}" type="datetimeFigureOut">
               <a:rPr lang="en-GB" smtClean="0"/>
-              <a:t>27/06/2025</a:t>
+              <a:t>27/10/2025</a:t>
             </a:fld>
             <a:endParaRPr lang="en-GB"/>
           </a:p>
@@ -3077,14 +3078,14 @@
           <p:nvPr>
             <p:extLst>
               <p:ext uri="{D42A27DB-BD31-4B8C-83A1-F6EECF244321}">
-                <p14:modId xmlns:p14="http://schemas.microsoft.com/office/powerpoint/2010/main" val="1638295686"/>
+                <p14:modId xmlns:p14="http://schemas.microsoft.com/office/powerpoint/2010/main" val="517257875"/>
               </p:ext>
             </p:extLst>
           </p:nvPr>
         </p:nvGraphicFramePr>
         <p:xfrm>
           <a:off x="-3914" y="3497365"/>
-          <a:ext cx="11988800" cy="370840"/>
+          <a:ext cx="12280572" cy="370840"/>
         </p:xfrm>
         <a:graphic>
           <a:graphicData uri="http://schemas.openxmlformats.org/drawingml/2006/table">
@@ -3093,42 +3094,42 @@
                 <a:tableStyleId>{5C22544A-7EE6-4342-B048-85BDC9FD1C3A}</a:tableStyleId>
               </a:tblPr>
               <a:tblGrid>
-                <a:gridCol w="664314">
+                <a:gridCol w="680482">
                   <a:extLst>
                     <a:ext uri="{9D8B030D-6E8A-4147-A177-3AD203B41FA5}">
                       <a16:colId xmlns:a16="http://schemas.microsoft.com/office/drawing/2014/main" val="1703629566"/>
                     </a:ext>
                   </a:extLst>
                 </a:gridCol>
-                <a:gridCol w="2435789">
+                <a:gridCol w="2495069">
                   <a:extLst>
                     <a:ext uri="{9D8B030D-6E8A-4147-A177-3AD203B41FA5}">
                       <a16:colId xmlns:a16="http://schemas.microsoft.com/office/drawing/2014/main" val="791467007"/>
                     </a:ext>
                   </a:extLst>
                 </a:gridCol>
-                <a:gridCol w="2268606">
+                <a:gridCol w="2323818">
                   <a:extLst>
                     <a:ext uri="{9D8B030D-6E8A-4147-A177-3AD203B41FA5}">
                       <a16:colId xmlns:a16="http://schemas.microsoft.com/office/drawing/2014/main" val="943490280"/>
                     </a:ext>
                   </a:extLst>
                 </a:gridCol>
-                <a:gridCol w="2166061">
+                <a:gridCol w="2218776">
                   <a:extLst>
                     <a:ext uri="{9D8B030D-6E8A-4147-A177-3AD203B41FA5}">
                       <a16:colId xmlns:a16="http://schemas.microsoft.com/office/drawing/2014/main" val="369987366"/>
                     </a:ext>
                   </a:extLst>
                 </a:gridCol>
-                <a:gridCol w="2225897">
+                <a:gridCol w="2280068">
                   <a:extLst>
                     <a:ext uri="{9D8B030D-6E8A-4147-A177-3AD203B41FA5}">
                       <a16:colId xmlns:a16="http://schemas.microsoft.com/office/drawing/2014/main" val="3615940755"/>
                     </a:ext>
                   </a:extLst>
                 </a:gridCol>
-                <a:gridCol w="2228133">
+                <a:gridCol w="2282359">
                   <a:extLst>
                     <a:ext uri="{9D8B030D-6E8A-4147-A177-3AD203B41FA5}">
                       <a16:colId xmlns:a16="http://schemas.microsoft.com/office/drawing/2014/main" val="704438616"/>
@@ -3599,14 +3600,14 @@
           <p:nvPr>
             <p:extLst>
               <p:ext uri="{D42A27DB-BD31-4B8C-83A1-F6EECF244321}">
-                <p14:modId xmlns:p14="http://schemas.microsoft.com/office/powerpoint/2010/main" val="1058834502"/>
+                <p14:modId xmlns:p14="http://schemas.microsoft.com/office/powerpoint/2010/main" val="1618309441"/>
               </p:ext>
             </p:extLst>
           </p:nvPr>
         </p:nvGraphicFramePr>
         <p:xfrm>
-          <a:off x="-21171" y="6468991"/>
-          <a:ext cx="12094962" cy="370840"/>
+          <a:off x="-21172" y="6468991"/>
+          <a:ext cx="12213170" cy="370840"/>
         </p:xfrm>
         <a:graphic>
           <a:graphicData uri="http://schemas.openxmlformats.org/drawingml/2006/table">
@@ -3615,42 +3616,42 @@
                 <a:tableStyleId>{5C22544A-7EE6-4342-B048-85BDC9FD1C3A}</a:tableStyleId>
               </a:tblPr>
               <a:tblGrid>
-                <a:gridCol w="675309">
+                <a:gridCol w="681909">
                   <a:extLst>
                     <a:ext uri="{9D8B030D-6E8A-4147-A177-3AD203B41FA5}">
                       <a16:colId xmlns:a16="http://schemas.microsoft.com/office/drawing/2014/main" val="1703629566"/>
                     </a:ext>
                   </a:extLst>
                 </a:gridCol>
-                <a:gridCol w="2452245">
+                <a:gridCol w="2476212">
                   <a:extLst>
                     <a:ext uri="{9D8B030D-6E8A-4147-A177-3AD203B41FA5}">
                       <a16:colId xmlns:a16="http://schemas.microsoft.com/office/drawing/2014/main" val="791467007"/>
                     </a:ext>
                   </a:extLst>
                 </a:gridCol>
-                <a:gridCol w="2288695">
+                <a:gridCol w="2311063">
                   <a:extLst>
                     <a:ext uri="{9D8B030D-6E8A-4147-A177-3AD203B41FA5}">
                       <a16:colId xmlns:a16="http://schemas.microsoft.com/office/drawing/2014/main" val="943490280"/>
                     </a:ext>
                   </a:extLst>
                 </a:gridCol>
-                <a:gridCol w="2185241">
+                <a:gridCol w="2206598">
                   <a:extLst>
                     <a:ext uri="{9D8B030D-6E8A-4147-A177-3AD203B41FA5}">
                       <a16:colId xmlns:a16="http://schemas.microsoft.com/office/drawing/2014/main" val="369987366"/>
                     </a:ext>
                   </a:extLst>
                 </a:gridCol>
-                <a:gridCol w="2245608">
+                <a:gridCol w="2267555">
                   <a:extLst>
                     <a:ext uri="{9D8B030D-6E8A-4147-A177-3AD203B41FA5}">
                       <a16:colId xmlns:a16="http://schemas.microsoft.com/office/drawing/2014/main" val="3615940755"/>
                     </a:ext>
                   </a:extLst>
                 </a:gridCol>
-                <a:gridCol w="2247864">
+                <a:gridCol w="2269833">
                   <a:extLst>
                     <a:ext uri="{9D8B030D-6E8A-4147-A177-3AD203B41FA5}">
                       <a16:colId xmlns:a16="http://schemas.microsoft.com/office/drawing/2014/main" val="704438616"/>
@@ -4112,7 +4113,7 @@
         </p:nvSpPr>
         <p:spPr>
           <a:xfrm>
-            <a:off x="-12700" y="3526224"/>
+            <a:off x="-12700" y="3493881"/>
             <a:ext cx="876300" cy="307777"/>
           </a:xfrm>
           <a:prstGeom prst="rect">
@@ -6576,6 +6577,3227 @@
           <a:chExt cx="0" cy="0"/>
         </a:xfrm>
       </p:grpSpPr>
+      <p:sp>
+        <p:nvSpPr>
+          <p:cNvPr id="2272" name="ZoneTexte 2271">
+            <a:extLst>
+              <a:ext uri="{FF2B5EF4-FFF2-40B4-BE49-F238E27FC236}">
+                <a16:creationId xmlns:a16="http://schemas.microsoft.com/office/drawing/2014/main" id="{80159BC2-C0F4-4CCA-AD29-6960052B70B8}"/>
+              </a:ext>
+            </a:extLst>
+          </p:cNvPr>
+          <p:cNvSpPr txBox="1"/>
+          <p:nvPr/>
+        </p:nvSpPr>
+        <p:spPr>
+          <a:xfrm>
+            <a:off x="-15119" y="5064881"/>
+            <a:ext cx="771071" cy="738664"/>
+          </a:xfrm>
+          <a:prstGeom prst="rect">
+            <a:avLst/>
+          </a:prstGeom>
+          <a:noFill/>
+        </p:spPr>
+        <p:txBody>
+          <a:bodyPr rot="0" spcFirstLastPara="0" vertOverflow="overflow" horzOverflow="overflow" vert="horz" wrap="square" lIns="91440" tIns="45720" rIns="91440" bIns="45720" numCol="1" spcCol="0" rtlCol="0" fromWordArt="0" anchor="t" anchorCtr="0" forceAA="0" compatLnSpc="1">
+            <a:prstTxWarp prst="textNoShape">
+              <a:avLst/>
+            </a:prstTxWarp>
+            <a:spAutoFit/>
+          </a:bodyPr>
+          <a:lstStyle/>
+          <a:p>
+            <a:r>
+              <a:rPr lang="fr-FR" sz="1400" b="1" dirty="0">
+                <a:latin typeface="Arial"/>
+                <a:cs typeface="Arial"/>
+              </a:rPr>
+              <a:t>Non-ESBL </a:t>
+            </a:r>
+            <a:r>
+              <a:rPr lang="fr-FR" sz="1400" b="1" i="1" dirty="0">
+                <a:latin typeface="Arial"/>
+                <a:cs typeface="Arial"/>
+              </a:rPr>
+              <a:t>E. coli</a:t>
+            </a:r>
+            <a:endParaRPr lang="fr-FR" sz="1400" i="1" dirty="0"/>
+          </a:p>
+        </p:txBody>
+      </p:sp>
+      <p:sp>
+        <p:nvSpPr>
+          <p:cNvPr id="2273" name="ZoneTexte 2272">
+            <a:extLst>
+              <a:ext uri="{FF2B5EF4-FFF2-40B4-BE49-F238E27FC236}">
+                <a16:creationId xmlns:a16="http://schemas.microsoft.com/office/drawing/2014/main" id="{4D5B0682-7D5B-4984-B73D-B7BF3B44BE99}"/>
+              </a:ext>
+            </a:extLst>
+          </p:cNvPr>
+          <p:cNvSpPr txBox="1"/>
+          <p:nvPr/>
+        </p:nvSpPr>
+        <p:spPr>
+          <a:xfrm>
+            <a:off x="-3914" y="1772124"/>
+            <a:ext cx="771071" cy="523220"/>
+          </a:xfrm>
+          <a:prstGeom prst="rect">
+            <a:avLst/>
+          </a:prstGeom>
+          <a:noFill/>
+        </p:spPr>
+        <p:txBody>
+          <a:bodyPr rot="0" spcFirstLastPara="0" vertOverflow="overflow" horzOverflow="overflow" vert="horz" wrap="square" lIns="91440" tIns="45720" rIns="91440" bIns="45720" numCol="1" spcCol="0" rtlCol="0" fromWordArt="0" anchor="t" anchorCtr="0" forceAA="0" compatLnSpc="1">
+            <a:prstTxWarp prst="textNoShape">
+              <a:avLst/>
+            </a:prstTxWarp>
+            <a:spAutoFit/>
+          </a:bodyPr>
+          <a:lstStyle/>
+          <a:p>
+            <a:r>
+              <a:rPr lang="fr-FR" sz="1400" b="1" dirty="0">
+                <a:latin typeface="Arial"/>
+                <a:cs typeface="Arial"/>
+              </a:rPr>
+              <a:t>ESBL </a:t>
+            </a:r>
+            <a:r>
+              <a:rPr lang="fr-FR" sz="1400" b="1" i="1" dirty="0">
+                <a:latin typeface="Arial"/>
+                <a:cs typeface="Arial"/>
+              </a:rPr>
+              <a:t>E. coli</a:t>
+            </a:r>
+            <a:endParaRPr lang="fr-FR" sz="1400" i="1" dirty="0"/>
+          </a:p>
+        </p:txBody>
+      </p:sp>
+      <p:sp>
+        <p:nvSpPr>
+          <p:cNvPr id="2274" name="ZoneTexte 2273">
+            <a:extLst>
+              <a:ext uri="{FF2B5EF4-FFF2-40B4-BE49-F238E27FC236}">
+                <a16:creationId xmlns:a16="http://schemas.microsoft.com/office/drawing/2014/main" id="{C466ED8C-D3A6-4DCB-B121-931B3B5348B0}"/>
+              </a:ext>
+            </a:extLst>
+          </p:cNvPr>
+          <p:cNvSpPr txBox="1"/>
+          <p:nvPr/>
+        </p:nvSpPr>
+        <p:spPr>
+          <a:xfrm>
+            <a:off x="1562172" y="806981"/>
+            <a:ext cx="771071" cy="307777"/>
+          </a:xfrm>
+          <a:prstGeom prst="rect">
+            <a:avLst/>
+          </a:prstGeom>
+          <a:noFill/>
+        </p:spPr>
+        <p:txBody>
+          <a:bodyPr rot="0" spcFirstLastPara="0" vertOverflow="overflow" horzOverflow="overflow" vert="horz" wrap="square" lIns="91440" tIns="45720" rIns="91440" bIns="45720" numCol="1" spcCol="0" rtlCol="0" fromWordArt="0" anchor="t" anchorCtr="0" forceAA="0" compatLnSpc="1">
+            <a:prstTxWarp prst="textNoShape">
+              <a:avLst/>
+            </a:prstTxWarp>
+            <a:spAutoFit/>
+          </a:bodyPr>
+          <a:lstStyle/>
+          <a:p>
+            <a:pPr algn="ctr"/>
+            <a:r>
+              <a:rPr lang="fr-FR" sz="1400" b="1">
+                <a:latin typeface="Arial"/>
+                <a:cs typeface="Arial"/>
+              </a:rPr>
+              <a:t>2018</a:t>
+            </a:r>
+          </a:p>
+        </p:txBody>
+      </p:sp>
+      <p:sp>
+        <p:nvSpPr>
+          <p:cNvPr id="2275" name="ZoneTexte 2274">
+            <a:extLst>
+              <a:ext uri="{FF2B5EF4-FFF2-40B4-BE49-F238E27FC236}">
+                <a16:creationId xmlns:a16="http://schemas.microsoft.com/office/drawing/2014/main" id="{A5B24D3A-5F13-4398-B482-F2CB5FC25B3D}"/>
+              </a:ext>
+            </a:extLst>
+          </p:cNvPr>
+          <p:cNvSpPr txBox="1"/>
+          <p:nvPr/>
+        </p:nvSpPr>
+        <p:spPr>
+          <a:xfrm>
+            <a:off x="3875066" y="806981"/>
+            <a:ext cx="771071" cy="307777"/>
+          </a:xfrm>
+          <a:prstGeom prst="rect">
+            <a:avLst/>
+          </a:prstGeom>
+          <a:noFill/>
+        </p:spPr>
+        <p:txBody>
+          <a:bodyPr rot="0" spcFirstLastPara="0" vertOverflow="overflow" horzOverflow="overflow" vert="horz" wrap="square" lIns="91440" tIns="45720" rIns="91440" bIns="45720" numCol="1" spcCol="0" rtlCol="0" fromWordArt="0" anchor="t" anchorCtr="0" forceAA="0" compatLnSpc="1">
+            <a:prstTxWarp prst="textNoShape">
+              <a:avLst/>
+            </a:prstTxWarp>
+            <a:spAutoFit/>
+          </a:bodyPr>
+          <a:lstStyle/>
+          <a:p>
+            <a:pPr algn="ctr"/>
+            <a:r>
+              <a:rPr lang="fr-FR" sz="1400" b="1" dirty="0">
+                <a:latin typeface="Arial"/>
+                <a:cs typeface="Arial"/>
+              </a:rPr>
+              <a:t>2019</a:t>
+            </a:r>
+          </a:p>
+        </p:txBody>
+      </p:sp>
+      <p:sp>
+        <p:nvSpPr>
+          <p:cNvPr id="2276" name="ZoneTexte 2275">
+            <a:extLst>
+              <a:ext uri="{FF2B5EF4-FFF2-40B4-BE49-F238E27FC236}">
+                <a16:creationId xmlns:a16="http://schemas.microsoft.com/office/drawing/2014/main" id="{356CFDE3-174D-4DFD-AD6B-4870B81BF63B}"/>
+              </a:ext>
+            </a:extLst>
+          </p:cNvPr>
+          <p:cNvSpPr txBox="1"/>
+          <p:nvPr/>
+        </p:nvSpPr>
+        <p:spPr>
+          <a:xfrm>
+            <a:off x="6187960" y="806980"/>
+            <a:ext cx="771071" cy="307777"/>
+          </a:xfrm>
+          <a:prstGeom prst="rect">
+            <a:avLst/>
+          </a:prstGeom>
+          <a:noFill/>
+        </p:spPr>
+        <p:txBody>
+          <a:bodyPr rot="0" spcFirstLastPara="0" vertOverflow="overflow" horzOverflow="overflow" vert="horz" wrap="square" lIns="91440" tIns="45720" rIns="91440" bIns="45720" numCol="1" spcCol="0" rtlCol="0" fromWordArt="0" anchor="t" anchorCtr="0" forceAA="0" compatLnSpc="1">
+            <a:prstTxWarp prst="textNoShape">
+              <a:avLst/>
+            </a:prstTxWarp>
+            <a:spAutoFit/>
+          </a:bodyPr>
+          <a:lstStyle/>
+          <a:p>
+            <a:pPr algn="ctr"/>
+            <a:r>
+              <a:rPr lang="fr-FR" sz="1400" b="1" dirty="0">
+                <a:latin typeface="Arial"/>
+                <a:cs typeface="Arial"/>
+              </a:rPr>
+              <a:t>2020</a:t>
+            </a:r>
+          </a:p>
+        </p:txBody>
+      </p:sp>
+      <p:sp>
+        <p:nvSpPr>
+          <p:cNvPr id="2277" name="ZoneTexte 2276">
+            <a:extLst>
+              <a:ext uri="{FF2B5EF4-FFF2-40B4-BE49-F238E27FC236}">
+                <a16:creationId xmlns:a16="http://schemas.microsoft.com/office/drawing/2014/main" id="{8A7B677F-3588-4305-ABC6-B5D8B624BF15}"/>
+              </a:ext>
+            </a:extLst>
+          </p:cNvPr>
+          <p:cNvSpPr txBox="1"/>
+          <p:nvPr/>
+        </p:nvSpPr>
+        <p:spPr>
+          <a:xfrm>
+            <a:off x="8500854" y="806981"/>
+            <a:ext cx="771071" cy="307777"/>
+          </a:xfrm>
+          <a:prstGeom prst="rect">
+            <a:avLst/>
+          </a:prstGeom>
+          <a:noFill/>
+        </p:spPr>
+        <p:txBody>
+          <a:bodyPr rot="0" spcFirstLastPara="0" vertOverflow="overflow" horzOverflow="overflow" vert="horz" wrap="square" lIns="91440" tIns="45720" rIns="91440" bIns="45720" numCol="1" spcCol="0" rtlCol="0" fromWordArt="0" anchor="t" anchorCtr="0" forceAA="0" compatLnSpc="1">
+            <a:prstTxWarp prst="textNoShape">
+              <a:avLst/>
+            </a:prstTxWarp>
+            <a:spAutoFit/>
+          </a:bodyPr>
+          <a:lstStyle/>
+          <a:p>
+            <a:pPr algn="ctr"/>
+            <a:r>
+              <a:rPr lang="fr-FR" sz="1400" b="1">
+                <a:latin typeface="Arial"/>
+                <a:cs typeface="Arial"/>
+              </a:rPr>
+              <a:t>2021</a:t>
+            </a:r>
+          </a:p>
+        </p:txBody>
+      </p:sp>
+      <p:sp>
+        <p:nvSpPr>
+          <p:cNvPr id="2278" name="ZoneTexte 2277">
+            <a:extLst>
+              <a:ext uri="{FF2B5EF4-FFF2-40B4-BE49-F238E27FC236}">
+                <a16:creationId xmlns:a16="http://schemas.microsoft.com/office/drawing/2014/main" id="{A3755FBE-FCE5-4770-ADB2-A8AE9718B847}"/>
+              </a:ext>
+            </a:extLst>
+          </p:cNvPr>
+          <p:cNvSpPr txBox="1"/>
+          <p:nvPr/>
+        </p:nvSpPr>
+        <p:spPr>
+          <a:xfrm>
+            <a:off x="10813748" y="800570"/>
+            <a:ext cx="771071" cy="307777"/>
+          </a:xfrm>
+          <a:prstGeom prst="rect">
+            <a:avLst/>
+          </a:prstGeom>
+          <a:noFill/>
+        </p:spPr>
+        <p:txBody>
+          <a:bodyPr rot="0" spcFirstLastPara="0" vertOverflow="overflow" horzOverflow="overflow" vert="horz" wrap="square" lIns="91440" tIns="45720" rIns="91440" bIns="45720" numCol="1" spcCol="0" rtlCol="0" fromWordArt="0" anchor="t" anchorCtr="0" forceAA="0" compatLnSpc="1">
+            <a:prstTxWarp prst="textNoShape">
+              <a:avLst/>
+            </a:prstTxWarp>
+            <a:spAutoFit/>
+          </a:bodyPr>
+          <a:lstStyle/>
+          <a:p>
+            <a:pPr algn="ctr"/>
+            <a:r>
+              <a:rPr lang="fr-FR" sz="1400" b="1">
+                <a:latin typeface="Arial"/>
+                <a:cs typeface="Arial"/>
+              </a:rPr>
+              <a:t>2022</a:t>
+            </a:r>
+          </a:p>
+        </p:txBody>
+      </p:sp>
+      <p:sp>
+        <p:nvSpPr>
+          <p:cNvPr id="2281" name="ZoneTexte 2280">
+            <a:extLst>
+              <a:ext uri="{FF2B5EF4-FFF2-40B4-BE49-F238E27FC236}">
+                <a16:creationId xmlns:a16="http://schemas.microsoft.com/office/drawing/2014/main" id="{DD2B28B0-AA25-47AD-8261-896136FAE9FA}"/>
+              </a:ext>
+            </a:extLst>
+          </p:cNvPr>
+          <p:cNvSpPr txBox="1"/>
+          <p:nvPr/>
+        </p:nvSpPr>
+        <p:spPr>
+          <a:xfrm>
+            <a:off x="-12700" y="3465850"/>
+            <a:ext cx="876300" cy="307777"/>
+          </a:xfrm>
+          <a:prstGeom prst="rect">
+            <a:avLst/>
+          </a:prstGeom>
+          <a:noFill/>
+        </p:spPr>
+        <p:txBody>
+          <a:bodyPr rot="0" spcFirstLastPara="0" vertOverflow="overflow" horzOverflow="overflow" vert="horz" wrap="square" lIns="91440" tIns="45720" rIns="91440" bIns="45720" numCol="1" spcCol="0" rtlCol="0" fromWordArt="0" anchor="t" anchorCtr="0" forceAA="0" compatLnSpc="1">
+            <a:prstTxWarp prst="textNoShape">
+              <a:avLst/>
+            </a:prstTxWarp>
+            <a:spAutoFit/>
+          </a:bodyPr>
+          <a:lstStyle/>
+          <a:p>
+            <a:r>
+              <a:rPr lang="fr-FR" sz="1400" dirty="0">
+                <a:latin typeface="Arial"/>
+                <a:cs typeface="Arial"/>
+              </a:rPr>
+              <a:t>Density</a:t>
+            </a:r>
+            <a:endParaRPr lang="fr-FR" sz="1400" dirty="0"/>
+          </a:p>
+        </p:txBody>
+      </p:sp>
+      <p:pic>
+        <p:nvPicPr>
+          <p:cNvPr id="2283" name="Image 2282">
+            <a:extLst>
+              <a:ext uri="{FF2B5EF4-FFF2-40B4-BE49-F238E27FC236}">
+                <a16:creationId xmlns:a16="http://schemas.microsoft.com/office/drawing/2014/main" id="{F1302604-DB1E-4EA3-85C7-6B69899FED0A}"/>
+              </a:ext>
+            </a:extLst>
+          </p:cNvPr>
+          <p:cNvPicPr>
+            <a:picLocks noChangeAspect="1"/>
+          </p:cNvPicPr>
+          <p:nvPr/>
+        </p:nvPicPr>
+        <p:blipFill rotWithShape="1">
+          <a:blip r:embed="rId2" cstate="print">
+            <a:extLst>
+              <a:ext uri="{28A0092B-C50C-407E-A947-70E740481C1C}">
+                <a14:useLocalDpi xmlns:a14="http://schemas.microsoft.com/office/drawing/2010/main" val="0"/>
+              </a:ext>
+            </a:extLst>
+          </a:blip>
+          <a:srcRect l="12473" t="10721" r="7870" b="13188"/>
+          <a:stretch/>
+        </p:blipFill>
+        <p:spPr>
+          <a:xfrm>
+            <a:off x="875421" y="1220177"/>
+            <a:ext cx="2172909" cy="2075628"/>
+          </a:xfrm>
+          <a:prstGeom prst="rect">
+            <a:avLst/>
+          </a:prstGeom>
+        </p:spPr>
+      </p:pic>
+      <p:pic>
+        <p:nvPicPr>
+          <p:cNvPr id="2284" name="Image 2283">
+            <a:extLst>
+              <a:ext uri="{FF2B5EF4-FFF2-40B4-BE49-F238E27FC236}">
+                <a16:creationId xmlns:a16="http://schemas.microsoft.com/office/drawing/2014/main" id="{DCC2907E-5CA0-4324-A5CD-C12987BE1B9E}"/>
+              </a:ext>
+            </a:extLst>
+          </p:cNvPr>
+          <p:cNvPicPr>
+            <a:picLocks noChangeAspect="1"/>
+          </p:cNvPicPr>
+          <p:nvPr/>
+        </p:nvPicPr>
+        <p:blipFill rotWithShape="1">
+          <a:blip r:embed="rId3" cstate="print">
+            <a:extLst>
+              <a:ext uri="{28A0092B-C50C-407E-A947-70E740481C1C}">
+                <a14:useLocalDpi xmlns:a14="http://schemas.microsoft.com/office/drawing/2010/main" val="0"/>
+              </a:ext>
+            </a:extLst>
+          </a:blip>
+          <a:srcRect l="13801" t="10381" r="7898" b="13155"/>
+          <a:stretch/>
+        </p:blipFill>
+        <p:spPr>
+          <a:xfrm>
+            <a:off x="858951" y="4161978"/>
+            <a:ext cx="2177515" cy="2126387"/>
+          </a:xfrm>
+          <a:prstGeom prst="rect">
+            <a:avLst/>
+          </a:prstGeom>
+        </p:spPr>
+      </p:pic>
+      <p:pic>
+        <p:nvPicPr>
+          <p:cNvPr id="2285" name="Image 2284">
+            <a:extLst>
+              <a:ext uri="{FF2B5EF4-FFF2-40B4-BE49-F238E27FC236}">
+                <a16:creationId xmlns:a16="http://schemas.microsoft.com/office/drawing/2014/main" id="{90A4B6A7-D505-4A20-ADDA-497FB7217E2D}"/>
+              </a:ext>
+            </a:extLst>
+          </p:cNvPr>
+          <p:cNvPicPr>
+            <a:picLocks noChangeAspect="1"/>
+          </p:cNvPicPr>
+          <p:nvPr/>
+        </p:nvPicPr>
+        <p:blipFill rotWithShape="1">
+          <a:blip r:embed="rId4" cstate="print">
+            <a:extLst>
+              <a:ext uri="{28A0092B-C50C-407E-A947-70E740481C1C}">
+                <a14:useLocalDpi xmlns:a14="http://schemas.microsoft.com/office/drawing/2010/main" val="0"/>
+              </a:ext>
+            </a:extLst>
+          </a:blip>
+          <a:srcRect l="12473" t="10721" r="7870" b="13188"/>
+          <a:stretch/>
+        </p:blipFill>
+        <p:spPr>
+          <a:xfrm>
+            <a:off x="3162673" y="1220177"/>
+            <a:ext cx="2172909" cy="2075628"/>
+          </a:xfrm>
+          <a:prstGeom prst="rect">
+            <a:avLst/>
+          </a:prstGeom>
+        </p:spPr>
+      </p:pic>
+      <p:pic>
+        <p:nvPicPr>
+          <p:cNvPr id="2286" name="Image 2285">
+            <a:extLst>
+              <a:ext uri="{FF2B5EF4-FFF2-40B4-BE49-F238E27FC236}">
+                <a16:creationId xmlns:a16="http://schemas.microsoft.com/office/drawing/2014/main" id="{D9924561-DA17-411B-9048-BB8851F29CDA}"/>
+              </a:ext>
+            </a:extLst>
+          </p:cNvPr>
+          <p:cNvPicPr>
+            <a:picLocks noChangeAspect="1"/>
+          </p:cNvPicPr>
+          <p:nvPr/>
+        </p:nvPicPr>
+        <p:blipFill rotWithShape="1">
+          <a:blip r:embed="rId5" cstate="print">
+            <a:extLst>
+              <a:ext uri="{28A0092B-C50C-407E-A947-70E740481C1C}">
+                <a14:useLocalDpi xmlns:a14="http://schemas.microsoft.com/office/drawing/2010/main" val="0"/>
+              </a:ext>
+            </a:extLst>
+          </a:blip>
+          <a:srcRect l="13801" t="10381" r="7474" b="13155"/>
+          <a:stretch/>
+        </p:blipFill>
+        <p:spPr>
+          <a:xfrm>
+            <a:off x="3120949" y="4161978"/>
+            <a:ext cx="2189316" cy="2126387"/>
+          </a:xfrm>
+          <a:prstGeom prst="rect">
+            <a:avLst/>
+          </a:prstGeom>
+        </p:spPr>
+      </p:pic>
+      <p:pic>
+        <p:nvPicPr>
+          <p:cNvPr id="2287" name="Image 2286">
+            <a:extLst>
+              <a:ext uri="{FF2B5EF4-FFF2-40B4-BE49-F238E27FC236}">
+                <a16:creationId xmlns:a16="http://schemas.microsoft.com/office/drawing/2014/main" id="{2BFFA536-3B1B-47B8-A062-85544907E987}"/>
+              </a:ext>
+            </a:extLst>
+          </p:cNvPr>
+          <p:cNvPicPr>
+            <a:picLocks noChangeAspect="1"/>
+          </p:cNvPicPr>
+          <p:nvPr/>
+        </p:nvPicPr>
+        <p:blipFill rotWithShape="1">
+          <a:blip r:embed="rId6" cstate="print">
+            <a:extLst>
+              <a:ext uri="{28A0092B-C50C-407E-A947-70E740481C1C}">
+                <a14:useLocalDpi xmlns:a14="http://schemas.microsoft.com/office/drawing/2010/main" val="0"/>
+              </a:ext>
+            </a:extLst>
+          </a:blip>
+          <a:srcRect l="12043" t="10721" r="7006" b="13399"/>
+          <a:stretch/>
+        </p:blipFill>
+        <p:spPr>
+          <a:xfrm>
+            <a:off x="5449925" y="1223043"/>
+            <a:ext cx="2208239" cy="2069896"/>
+          </a:xfrm>
+          <a:prstGeom prst="rect">
+            <a:avLst/>
+          </a:prstGeom>
+        </p:spPr>
+      </p:pic>
+      <p:pic>
+        <p:nvPicPr>
+          <p:cNvPr id="2288" name="Image 2287">
+            <a:extLst>
+              <a:ext uri="{FF2B5EF4-FFF2-40B4-BE49-F238E27FC236}">
+                <a16:creationId xmlns:a16="http://schemas.microsoft.com/office/drawing/2014/main" id="{7DAE70A5-1BF5-4837-8D81-D12C12EA2C35}"/>
+              </a:ext>
+            </a:extLst>
+          </p:cNvPr>
+          <p:cNvPicPr>
+            <a:picLocks noChangeAspect="1"/>
+          </p:cNvPicPr>
+          <p:nvPr/>
+        </p:nvPicPr>
+        <p:blipFill rotWithShape="1">
+          <a:blip r:embed="rId7" cstate="print">
+            <a:extLst>
+              <a:ext uri="{28A0092B-C50C-407E-A947-70E740481C1C}">
+                <a14:useLocalDpi xmlns:a14="http://schemas.microsoft.com/office/drawing/2010/main" val="0"/>
+              </a:ext>
+            </a:extLst>
+          </a:blip>
+          <a:srcRect l="11419" t="10381" r="9129" b="13155"/>
+          <a:stretch/>
+        </p:blipFill>
+        <p:spPr>
+          <a:xfrm>
+            <a:off x="5394747" y="4161978"/>
+            <a:ext cx="2209488" cy="2126387"/>
+          </a:xfrm>
+          <a:prstGeom prst="rect">
+            <a:avLst/>
+          </a:prstGeom>
+        </p:spPr>
+      </p:pic>
+      <p:pic>
+        <p:nvPicPr>
+          <p:cNvPr id="2289" name="Image 2288">
+            <a:extLst>
+              <a:ext uri="{FF2B5EF4-FFF2-40B4-BE49-F238E27FC236}">
+                <a16:creationId xmlns:a16="http://schemas.microsoft.com/office/drawing/2014/main" id="{7B23469B-670B-42FC-AEC8-15F8EA3BA05A}"/>
+              </a:ext>
+            </a:extLst>
+          </p:cNvPr>
+          <p:cNvPicPr>
+            <a:picLocks noChangeAspect="1"/>
+          </p:cNvPicPr>
+          <p:nvPr/>
+        </p:nvPicPr>
+        <p:blipFill rotWithShape="1">
+          <a:blip r:embed="rId8" cstate="print">
+            <a:extLst>
+              <a:ext uri="{28A0092B-C50C-407E-A947-70E740481C1C}">
+                <a14:useLocalDpi xmlns:a14="http://schemas.microsoft.com/office/drawing/2010/main" val="0"/>
+              </a:ext>
+            </a:extLst>
+          </a:blip>
+          <a:srcRect l="12043" t="10721" r="7006" b="13399"/>
+          <a:stretch/>
+        </p:blipFill>
+        <p:spPr>
+          <a:xfrm>
+            <a:off x="7772507" y="1223043"/>
+            <a:ext cx="2208239" cy="2069896"/>
+          </a:xfrm>
+          <a:prstGeom prst="rect">
+            <a:avLst/>
+          </a:prstGeom>
+        </p:spPr>
+      </p:pic>
+      <p:pic>
+        <p:nvPicPr>
+          <p:cNvPr id="2290" name="Image 2289">
+            <a:extLst>
+              <a:ext uri="{FF2B5EF4-FFF2-40B4-BE49-F238E27FC236}">
+                <a16:creationId xmlns:a16="http://schemas.microsoft.com/office/drawing/2014/main" id="{61C7737B-5B0D-4A9E-B08B-0AFD6C6B49FC}"/>
+              </a:ext>
+            </a:extLst>
+          </p:cNvPr>
+          <p:cNvPicPr>
+            <a:picLocks noChangeAspect="1"/>
+          </p:cNvPicPr>
+          <p:nvPr/>
+        </p:nvPicPr>
+        <p:blipFill rotWithShape="1">
+          <a:blip r:embed="rId9" cstate="print">
+            <a:extLst>
+              <a:ext uri="{28A0092B-C50C-407E-A947-70E740481C1C}">
+                <a14:useLocalDpi xmlns:a14="http://schemas.microsoft.com/office/drawing/2010/main" val="0"/>
+              </a:ext>
+            </a:extLst>
+          </a:blip>
+          <a:srcRect l="13801" t="10381" r="8993" b="13155"/>
+          <a:stretch/>
+        </p:blipFill>
+        <p:spPr>
+          <a:xfrm>
+            <a:off x="7688718" y="4161978"/>
+            <a:ext cx="2147074" cy="2126387"/>
+          </a:xfrm>
+          <a:prstGeom prst="rect">
+            <a:avLst/>
+          </a:prstGeom>
+        </p:spPr>
+      </p:pic>
+      <p:pic>
+        <p:nvPicPr>
+          <p:cNvPr id="2291" name="Image 2290">
+            <a:extLst>
+              <a:ext uri="{FF2B5EF4-FFF2-40B4-BE49-F238E27FC236}">
+                <a16:creationId xmlns:a16="http://schemas.microsoft.com/office/drawing/2014/main" id="{53EEA248-21B2-41A5-B276-AA0E8E1A2D5D}"/>
+              </a:ext>
+            </a:extLst>
+          </p:cNvPr>
+          <p:cNvPicPr>
+            <a:picLocks noChangeAspect="1"/>
+          </p:cNvPicPr>
+          <p:nvPr/>
+        </p:nvPicPr>
+        <p:blipFill rotWithShape="1">
+          <a:blip r:embed="rId10" cstate="print">
+            <a:extLst>
+              <a:ext uri="{28A0092B-C50C-407E-A947-70E740481C1C}">
+                <a14:useLocalDpi xmlns:a14="http://schemas.microsoft.com/office/drawing/2010/main" val="0"/>
+              </a:ext>
+            </a:extLst>
+          </a:blip>
+          <a:srcRect l="13295" t="10721" r="9835" b="13399"/>
+          <a:stretch/>
+        </p:blipFill>
+        <p:spPr>
+          <a:xfrm>
+            <a:off x="10095088" y="1223043"/>
+            <a:ext cx="2096912" cy="2069896"/>
+          </a:xfrm>
+          <a:prstGeom prst="rect">
+            <a:avLst/>
+          </a:prstGeom>
+        </p:spPr>
+      </p:pic>
+      <p:pic>
+        <p:nvPicPr>
+          <p:cNvPr id="2292" name="Image 2291">
+            <a:extLst>
+              <a:ext uri="{FF2B5EF4-FFF2-40B4-BE49-F238E27FC236}">
+                <a16:creationId xmlns:a16="http://schemas.microsoft.com/office/drawing/2014/main" id="{09D900BA-1AD0-4D51-9862-03CB7DF837AA}"/>
+              </a:ext>
+            </a:extLst>
+          </p:cNvPr>
+          <p:cNvPicPr>
+            <a:picLocks noChangeAspect="1"/>
+          </p:cNvPicPr>
+          <p:nvPr/>
+        </p:nvPicPr>
+        <p:blipFill rotWithShape="1">
+          <a:blip r:embed="rId11" cstate="print">
+            <a:extLst>
+              <a:ext uri="{28A0092B-C50C-407E-A947-70E740481C1C}">
+                <a14:useLocalDpi xmlns:a14="http://schemas.microsoft.com/office/drawing/2010/main" val="0"/>
+              </a:ext>
+            </a:extLst>
+          </a:blip>
+          <a:srcRect l="11420" t="10382" r="6891" b="13156"/>
+          <a:stretch/>
+        </p:blipFill>
+        <p:spPr>
+          <a:xfrm>
+            <a:off x="9920274" y="4161978"/>
+            <a:ext cx="2271726" cy="2126387"/>
+          </a:xfrm>
+          <a:prstGeom prst="rect">
+            <a:avLst/>
+          </a:prstGeom>
+        </p:spPr>
+      </p:pic>
+      <p:grpSp>
+        <p:nvGrpSpPr>
+          <p:cNvPr id="2" name="Groupe 1">
+            <a:extLst>
+              <a:ext uri="{FF2B5EF4-FFF2-40B4-BE49-F238E27FC236}">
+                <a16:creationId xmlns:a16="http://schemas.microsoft.com/office/drawing/2014/main" id="{A4BFAB79-DCFA-46DA-9E2F-812571AF4DC3}"/>
+              </a:ext>
+            </a:extLst>
+          </p:cNvPr>
+          <p:cNvGrpSpPr/>
+          <p:nvPr/>
+        </p:nvGrpSpPr>
+        <p:grpSpPr>
+          <a:xfrm>
+            <a:off x="-11761" y="7029150"/>
+            <a:ext cx="13080507" cy="3267895"/>
+            <a:chOff x="-11761" y="7029150"/>
+            <a:chExt cx="14496366" cy="3853226"/>
+          </a:xfrm>
+        </p:grpSpPr>
+        <p:pic>
+          <p:nvPicPr>
+            <p:cNvPr id="23" name="Image 22">
+              <a:extLst>
+                <a:ext uri="{FF2B5EF4-FFF2-40B4-BE49-F238E27FC236}">
+                  <a16:creationId xmlns:a16="http://schemas.microsoft.com/office/drawing/2014/main" id="{C7E03C22-9B5D-4E52-9105-A91C324EA5C7}"/>
+                </a:ext>
+              </a:extLst>
+            </p:cNvPr>
+            <p:cNvPicPr>
+              <a:picLocks noChangeAspect="1"/>
+            </p:cNvPicPr>
+            <p:nvPr/>
+          </p:nvPicPr>
+          <p:blipFill rotWithShape="1">
+            <a:blip r:embed="rId12" cstate="print">
+              <a:extLst>
+                <a:ext uri="{28A0092B-C50C-407E-A947-70E740481C1C}">
+                  <a14:useLocalDpi xmlns:a14="http://schemas.microsoft.com/office/drawing/2010/main" val="0"/>
+                </a:ext>
+              </a:extLst>
+            </a:blip>
+            <a:srcRect l="19698" t="44126" r="17367" b="45674"/>
+            <a:stretch/>
+          </p:blipFill>
+          <p:spPr>
+            <a:xfrm>
+              <a:off x="7110605" y="9267786"/>
+              <a:ext cx="6822810" cy="781737"/>
+            </a:xfrm>
+            <a:prstGeom prst="rect">
+              <a:avLst/>
+            </a:prstGeom>
+          </p:spPr>
+        </p:pic>
+        <p:pic>
+          <p:nvPicPr>
+            <p:cNvPr id="24" name="Image 23">
+              <a:extLst>
+                <a:ext uri="{FF2B5EF4-FFF2-40B4-BE49-F238E27FC236}">
+                  <a16:creationId xmlns:a16="http://schemas.microsoft.com/office/drawing/2014/main" id="{B1F55FBE-70F7-48C4-9694-B70938360A5B}"/>
+                </a:ext>
+              </a:extLst>
+            </p:cNvPr>
+            <p:cNvPicPr>
+              <a:picLocks noChangeAspect="1"/>
+            </p:cNvPicPr>
+            <p:nvPr/>
+          </p:nvPicPr>
+          <p:blipFill rotWithShape="1">
+            <a:blip r:embed="rId13" cstate="print">
+              <a:extLst>
+                <a:ext uri="{28A0092B-C50C-407E-A947-70E740481C1C}">
+                  <a14:useLocalDpi xmlns:a14="http://schemas.microsoft.com/office/drawing/2010/main" val="0"/>
+                </a:ext>
+              </a:extLst>
+            </a:blip>
+            <a:srcRect l="19698" t="44126" r="17368" b="45674"/>
+            <a:stretch/>
+          </p:blipFill>
+          <p:spPr>
+            <a:xfrm>
+              <a:off x="-11761" y="10100639"/>
+              <a:ext cx="6822809" cy="781737"/>
+            </a:xfrm>
+            <a:prstGeom prst="rect">
+              <a:avLst/>
+            </a:prstGeom>
+          </p:spPr>
+        </p:pic>
+        <p:pic>
+          <p:nvPicPr>
+            <p:cNvPr id="25" name="Image 24">
+              <a:extLst>
+                <a:ext uri="{FF2B5EF4-FFF2-40B4-BE49-F238E27FC236}">
+                  <a16:creationId xmlns:a16="http://schemas.microsoft.com/office/drawing/2014/main" id="{791037B1-A7F4-42E7-AE7B-17AD4445668A}"/>
+                </a:ext>
+              </a:extLst>
+            </p:cNvPr>
+            <p:cNvPicPr>
+              <a:picLocks noChangeAspect="1"/>
+            </p:cNvPicPr>
+            <p:nvPr/>
+          </p:nvPicPr>
+          <p:blipFill rotWithShape="1">
+            <a:blip r:embed="rId14" cstate="print">
+              <a:extLst>
+                <a:ext uri="{28A0092B-C50C-407E-A947-70E740481C1C}">
+                  <a14:useLocalDpi xmlns:a14="http://schemas.microsoft.com/office/drawing/2010/main" val="0"/>
+                </a:ext>
+              </a:extLst>
+            </a:blip>
+            <a:srcRect l="19698" t="44126" r="17367" b="45674"/>
+            <a:stretch/>
+          </p:blipFill>
+          <p:spPr>
+            <a:xfrm>
+              <a:off x="7110607" y="10100639"/>
+              <a:ext cx="6822809" cy="781737"/>
+            </a:xfrm>
+            <a:prstGeom prst="rect">
+              <a:avLst/>
+            </a:prstGeom>
+          </p:spPr>
+        </p:pic>
+        <p:grpSp>
+          <p:nvGrpSpPr>
+            <p:cNvPr id="26" name="Groupe 25">
+              <a:extLst>
+                <a:ext uri="{FF2B5EF4-FFF2-40B4-BE49-F238E27FC236}">
+                  <a16:creationId xmlns:a16="http://schemas.microsoft.com/office/drawing/2014/main" id="{7B9B19AC-AFC1-4B5E-B8BE-6E521E2A1DF6}"/>
+                </a:ext>
+              </a:extLst>
+            </p:cNvPr>
+            <p:cNvGrpSpPr/>
+            <p:nvPr/>
+          </p:nvGrpSpPr>
+          <p:grpSpPr>
+            <a:xfrm>
+              <a:off x="-11761" y="7029150"/>
+              <a:ext cx="14496366" cy="2115159"/>
+              <a:chOff x="15364749" y="12932770"/>
+              <a:chExt cx="14910965" cy="2175653"/>
+            </a:xfrm>
+          </p:grpSpPr>
+          <p:grpSp>
+            <p:nvGrpSpPr>
+              <p:cNvPr id="27" name="Groupe 26">
+                <a:extLst>
+                  <a:ext uri="{FF2B5EF4-FFF2-40B4-BE49-F238E27FC236}">
+                    <a16:creationId xmlns:a16="http://schemas.microsoft.com/office/drawing/2014/main" id="{AB4AA599-4F1D-4158-B1C8-854AFB7E5061}"/>
+                  </a:ext>
+                </a:extLst>
+              </p:cNvPr>
+              <p:cNvGrpSpPr/>
+              <p:nvPr/>
+            </p:nvGrpSpPr>
+            <p:grpSpPr>
+              <a:xfrm>
+                <a:off x="15364749" y="12932770"/>
+                <a:ext cx="14910965" cy="2175653"/>
+                <a:chOff x="15364749" y="12932770"/>
+                <a:chExt cx="14910965" cy="2175653"/>
+              </a:xfrm>
+            </p:grpSpPr>
+            <p:grpSp>
+              <p:nvGrpSpPr>
+                <p:cNvPr id="29" name="Groupe 28">
+                  <a:extLst>
+                    <a:ext uri="{FF2B5EF4-FFF2-40B4-BE49-F238E27FC236}">
+                      <a16:creationId xmlns:a16="http://schemas.microsoft.com/office/drawing/2014/main" id="{4A3A7994-A374-4E74-AB8D-C4817C528119}"/>
+                    </a:ext>
+                  </a:extLst>
+                </p:cNvPr>
+                <p:cNvGrpSpPr/>
+                <p:nvPr/>
+              </p:nvGrpSpPr>
+              <p:grpSpPr>
+                <a:xfrm>
+                  <a:off x="15364749" y="12932770"/>
+                  <a:ext cx="14910965" cy="2175653"/>
+                  <a:chOff x="-1" y="2208356"/>
+                  <a:chExt cx="14910965" cy="2175653"/>
+                </a:xfrm>
+              </p:grpSpPr>
+              <p:sp>
+                <p:nvSpPr>
+                  <p:cNvPr id="31" name="Rectangle 30">
+                    <a:extLst>
+                      <a:ext uri="{FF2B5EF4-FFF2-40B4-BE49-F238E27FC236}">
+                        <a16:creationId xmlns:a16="http://schemas.microsoft.com/office/drawing/2014/main" id="{DB30B550-AF2F-4D4F-8B9A-7131115A8E81}"/>
+                      </a:ext>
+                    </a:extLst>
+                  </p:cNvPr>
+                  <p:cNvSpPr/>
+                  <p:nvPr/>
+                </p:nvSpPr>
+                <p:spPr>
+                  <a:xfrm>
+                    <a:off x="-1" y="2208356"/>
+                    <a:ext cx="14344010" cy="2175653"/>
+                  </a:xfrm>
+                  <a:prstGeom prst="rect">
+                    <a:avLst/>
+                  </a:prstGeom>
+                  <a:noFill/>
+                  <a:ln w="19050">
+                    <a:solidFill>
+                      <a:schemeClr val="tx1"/>
+                    </a:solidFill>
+                  </a:ln>
+                </p:spPr>
+                <p:style>
+                  <a:lnRef idx="2">
+                    <a:schemeClr val="accent1">
+                      <a:shade val="50000"/>
+                    </a:schemeClr>
+                  </a:lnRef>
+                  <a:fillRef idx="1">
+                    <a:schemeClr val="accent1"/>
+                  </a:fillRef>
+                  <a:effectRef idx="0">
+                    <a:schemeClr val="accent1"/>
+                  </a:effectRef>
+                  <a:fontRef idx="minor">
+                    <a:schemeClr val="lt1"/>
+                  </a:fontRef>
+                </p:style>
+                <p:txBody>
+                  <a:bodyPr rtlCol="0" anchor="t"/>
+                  <a:lstStyle/>
+                  <a:p>
+                    <a:endParaRPr lang="fr-FR" sz="389" dirty="0">
+                      <a:solidFill>
+                        <a:sysClr val="windowText" lastClr="000000"/>
+                      </a:solidFill>
+                      <a:latin typeface="Arial" panose="020B0604020202020204" pitchFamily="34" charset="0"/>
+                      <a:cs typeface="Arial" panose="020B0604020202020204" pitchFamily="34" charset="0"/>
+                    </a:endParaRPr>
+                  </a:p>
+                </p:txBody>
+              </p:sp>
+              <p:sp>
+                <p:nvSpPr>
+                  <p:cNvPr id="32" name="Rectangle 31">
+                    <a:extLst>
+                      <a:ext uri="{FF2B5EF4-FFF2-40B4-BE49-F238E27FC236}">
+                        <a16:creationId xmlns:a16="http://schemas.microsoft.com/office/drawing/2014/main" id="{CA321B79-7293-4C1D-B621-FC1B2740C90E}"/>
+                      </a:ext>
+                    </a:extLst>
+                  </p:cNvPr>
+                  <p:cNvSpPr/>
+                  <p:nvPr/>
+                </p:nvSpPr>
+                <p:spPr>
+                  <a:xfrm>
+                    <a:off x="2431818" y="2365729"/>
+                    <a:ext cx="534525" cy="317902"/>
+                  </a:xfrm>
+                  <a:prstGeom prst="rect">
+                    <a:avLst/>
+                  </a:prstGeom>
+                  <a:solidFill>
+                    <a:srgbClr val="DCDCDC"/>
+                  </a:solidFill>
+                  <a:ln>
+                    <a:solidFill>
+                      <a:schemeClr val="tx1"/>
+                    </a:solidFill>
+                  </a:ln>
+                </p:spPr>
+                <p:style>
+                  <a:lnRef idx="2">
+                    <a:schemeClr val="accent1">
+                      <a:shade val="50000"/>
+                    </a:schemeClr>
+                  </a:lnRef>
+                  <a:fillRef idx="1">
+                    <a:schemeClr val="accent1"/>
+                  </a:fillRef>
+                  <a:effectRef idx="0">
+                    <a:schemeClr val="accent1"/>
+                  </a:effectRef>
+                  <a:fontRef idx="minor">
+                    <a:schemeClr val="lt1"/>
+                  </a:fontRef>
+                </p:style>
+                <p:txBody>
+                  <a:bodyPr rtlCol="0" anchor="ctr"/>
+                  <a:lstStyle/>
+                  <a:p>
+                    <a:pPr algn="ctr"/>
+                    <a:endParaRPr lang="fr-FR" sz="1750" dirty="0">
+                      <a:latin typeface="Arial" panose="020B0604020202020204" pitchFamily="34" charset="0"/>
+                      <a:cs typeface="Arial" panose="020B0604020202020204" pitchFamily="34" charset="0"/>
+                    </a:endParaRPr>
+                  </a:p>
+                </p:txBody>
+              </p:sp>
+              <p:sp>
+                <p:nvSpPr>
+                  <p:cNvPr id="33" name="ZoneTexte 32">
+                    <a:extLst>
+                      <a:ext uri="{FF2B5EF4-FFF2-40B4-BE49-F238E27FC236}">
+                        <a16:creationId xmlns:a16="http://schemas.microsoft.com/office/drawing/2014/main" id="{41FF9411-787A-4D84-8E90-8D6E04FE72EB}"/>
+                      </a:ext>
+                    </a:extLst>
+                  </p:cNvPr>
+                  <p:cNvSpPr txBox="1"/>
+                  <p:nvPr/>
+                </p:nvSpPr>
+                <p:spPr>
+                  <a:xfrm>
+                    <a:off x="2966343" y="2347439"/>
+                    <a:ext cx="1978959" cy="410611"/>
+                  </a:xfrm>
+                  <a:prstGeom prst="rect">
+                    <a:avLst/>
+                  </a:prstGeom>
+                  <a:noFill/>
+                </p:spPr>
+                <p:txBody>
+                  <a:bodyPr wrap="square" rtlCol="0">
+                    <a:spAutoFit/>
+                  </a:bodyPr>
+                  <a:lstStyle/>
+                  <a:p>
+                    <a:r>
+                      <a:rPr lang="fr-FR" sz="1600" dirty="0">
+                        <a:latin typeface="Arial" panose="020B0604020202020204" pitchFamily="34" charset="0"/>
+                        <a:cs typeface="Arial" panose="020B0604020202020204" pitchFamily="34" charset="0"/>
+                      </a:rPr>
+                      <a:t>% Not tested</a:t>
+                    </a:r>
+                  </a:p>
+                </p:txBody>
+              </p:sp>
+              <p:sp>
+                <p:nvSpPr>
+                  <p:cNvPr id="34" name="Rectangle 33">
+                    <a:extLst>
+                      <a:ext uri="{FF2B5EF4-FFF2-40B4-BE49-F238E27FC236}">
+                        <a16:creationId xmlns:a16="http://schemas.microsoft.com/office/drawing/2014/main" id="{50E52BB0-313F-465C-9BF5-46010AAB3B24}"/>
+                      </a:ext>
+                    </a:extLst>
+                  </p:cNvPr>
+                  <p:cNvSpPr/>
+                  <p:nvPr/>
+                </p:nvSpPr>
+                <p:spPr>
+                  <a:xfrm>
+                    <a:off x="6709544" y="2347439"/>
+                    <a:ext cx="534525" cy="317902"/>
+                  </a:xfrm>
+                  <a:prstGeom prst="rect">
+                    <a:avLst/>
+                  </a:prstGeom>
+                  <a:solidFill>
+                    <a:schemeClr val="bg1"/>
+                  </a:solidFill>
+                  <a:ln>
+                    <a:solidFill>
+                      <a:schemeClr val="tx1"/>
+                    </a:solidFill>
+                  </a:ln>
+                </p:spPr>
+                <p:style>
+                  <a:lnRef idx="2">
+                    <a:schemeClr val="accent1">
+                      <a:shade val="50000"/>
+                    </a:schemeClr>
+                  </a:lnRef>
+                  <a:fillRef idx="1">
+                    <a:schemeClr val="accent1"/>
+                  </a:fillRef>
+                  <a:effectRef idx="0">
+                    <a:schemeClr val="accent1"/>
+                  </a:effectRef>
+                  <a:fontRef idx="minor">
+                    <a:schemeClr val="lt1"/>
+                  </a:fontRef>
+                </p:style>
+                <p:txBody>
+                  <a:bodyPr rtlCol="0" anchor="ctr"/>
+                  <a:lstStyle/>
+                  <a:p>
+                    <a:pPr algn="ctr"/>
+                    <a:endParaRPr lang="fr-FR" sz="1750" dirty="0">
+                      <a:latin typeface="Arial" panose="020B0604020202020204" pitchFamily="34" charset="0"/>
+                      <a:cs typeface="Arial" panose="020B0604020202020204" pitchFamily="34" charset="0"/>
+                    </a:endParaRPr>
+                  </a:p>
+                </p:txBody>
+              </p:sp>
+              <p:sp>
+                <p:nvSpPr>
+                  <p:cNvPr id="35" name="ZoneTexte 34">
+                    <a:extLst>
+                      <a:ext uri="{FF2B5EF4-FFF2-40B4-BE49-F238E27FC236}">
+                        <a16:creationId xmlns:a16="http://schemas.microsoft.com/office/drawing/2014/main" id="{2F5D3678-58A4-422C-8A35-F2F2955D860E}"/>
+                      </a:ext>
+                    </a:extLst>
+                  </p:cNvPr>
+                  <p:cNvSpPr txBox="1"/>
+                  <p:nvPr/>
+                </p:nvSpPr>
+                <p:spPr>
+                  <a:xfrm>
+                    <a:off x="7242395" y="2312982"/>
+                    <a:ext cx="1978959" cy="410611"/>
+                  </a:xfrm>
+                  <a:prstGeom prst="rect">
+                    <a:avLst/>
+                  </a:prstGeom>
+                  <a:noFill/>
+                </p:spPr>
+                <p:txBody>
+                  <a:bodyPr wrap="square" rtlCol="0">
+                    <a:spAutoFit/>
+                  </a:bodyPr>
+                  <a:lstStyle/>
+                  <a:p>
+                    <a:r>
+                      <a:rPr lang="fr-FR" sz="1600" dirty="0">
+                        <a:latin typeface="Arial" panose="020B0604020202020204" pitchFamily="34" charset="0"/>
+                        <a:cs typeface="Arial" panose="020B0604020202020204" pitchFamily="34" charset="0"/>
+                      </a:rPr>
+                      <a:t>% Susceptible</a:t>
+                    </a:r>
+                  </a:p>
+                </p:txBody>
+              </p:sp>
+              <p:sp>
+                <p:nvSpPr>
+                  <p:cNvPr id="36" name="Rectangle 35">
+                    <a:extLst>
+                      <a:ext uri="{FF2B5EF4-FFF2-40B4-BE49-F238E27FC236}">
+                        <a16:creationId xmlns:a16="http://schemas.microsoft.com/office/drawing/2014/main" id="{56E1D182-CAE2-467D-82F2-1B3109A12135}"/>
+                      </a:ext>
+                    </a:extLst>
+                  </p:cNvPr>
+                  <p:cNvSpPr/>
+                  <p:nvPr/>
+                </p:nvSpPr>
+                <p:spPr>
+                  <a:xfrm>
+                    <a:off x="10992549" y="2364412"/>
+                    <a:ext cx="534525" cy="317902"/>
+                  </a:xfrm>
+                  <a:prstGeom prst="rect">
+                    <a:avLst/>
+                  </a:prstGeom>
+                  <a:gradFill flip="none" rotWithShape="1">
+                    <a:gsLst>
+                      <a:gs pos="0">
+                        <a:srgbClr val="23C997"/>
+                      </a:gs>
+                      <a:gs pos="7000">
+                        <a:srgbClr val="DCB702"/>
+                      </a:gs>
+                      <a:gs pos="82000">
+                        <a:srgbClr val="FF7F40"/>
+                      </a:gs>
+                      <a:gs pos="27000">
+                        <a:srgbClr val="3E7CA5"/>
+                      </a:gs>
+                      <a:gs pos="16000">
+                        <a:srgbClr val="7EC8E3"/>
+                      </a:gs>
+                      <a:gs pos="70000">
+                        <a:srgbClr val="EE637F"/>
+                      </a:gs>
+                      <a:gs pos="59000">
+                        <a:srgbClr val="62C966"/>
+                      </a:gs>
+                      <a:gs pos="47000">
+                        <a:srgbClr val="B155A7"/>
+                      </a:gs>
+                      <a:gs pos="38000">
+                        <a:srgbClr val="D38ACB"/>
+                      </a:gs>
+                      <a:gs pos="93000">
+                        <a:srgbClr val="BCED54"/>
+                      </a:gs>
+                    </a:gsLst>
+                    <a:lin ang="0" scaled="1"/>
+                    <a:tileRect/>
+                  </a:gradFill>
+                  <a:ln>
+                    <a:solidFill>
+                      <a:schemeClr val="tx1"/>
+                    </a:solidFill>
+                  </a:ln>
+                </p:spPr>
+                <p:style>
+                  <a:lnRef idx="2">
+                    <a:schemeClr val="accent1">
+                      <a:shade val="50000"/>
+                    </a:schemeClr>
+                  </a:lnRef>
+                  <a:fillRef idx="1">
+                    <a:schemeClr val="accent1"/>
+                  </a:fillRef>
+                  <a:effectRef idx="0">
+                    <a:schemeClr val="accent1"/>
+                  </a:effectRef>
+                  <a:fontRef idx="minor">
+                    <a:schemeClr val="lt1"/>
+                  </a:fontRef>
+                </p:style>
+                <p:txBody>
+                  <a:bodyPr rtlCol="0" anchor="ctr"/>
+                  <a:lstStyle/>
+                  <a:p>
+                    <a:pPr algn="ctr"/>
+                    <a:endParaRPr lang="fr-FR" sz="972" dirty="0">
+                      <a:solidFill>
+                        <a:schemeClr val="tx1"/>
+                      </a:solidFill>
+                      <a:latin typeface="Arial" panose="020B0604020202020204" pitchFamily="34" charset="0"/>
+                      <a:cs typeface="Arial" panose="020B0604020202020204" pitchFamily="34" charset="0"/>
+                    </a:endParaRPr>
+                  </a:p>
+                </p:txBody>
+              </p:sp>
+              <p:sp>
+                <p:nvSpPr>
+                  <p:cNvPr id="37" name="ZoneTexte 36">
+                    <a:extLst>
+                      <a:ext uri="{FF2B5EF4-FFF2-40B4-BE49-F238E27FC236}">
+                        <a16:creationId xmlns:a16="http://schemas.microsoft.com/office/drawing/2014/main" id="{8833109E-C617-41CD-963A-57E049FE18B2}"/>
+                      </a:ext>
+                    </a:extLst>
+                  </p:cNvPr>
+                  <p:cNvSpPr txBox="1"/>
+                  <p:nvPr/>
+                </p:nvSpPr>
+                <p:spPr>
+                  <a:xfrm>
+                    <a:off x="11527074" y="2338697"/>
+                    <a:ext cx="1978959" cy="410611"/>
+                  </a:xfrm>
+                  <a:prstGeom prst="rect">
+                    <a:avLst/>
+                  </a:prstGeom>
+                  <a:noFill/>
+                </p:spPr>
+                <p:txBody>
+                  <a:bodyPr wrap="square" rtlCol="0">
+                    <a:spAutoFit/>
+                  </a:bodyPr>
+                  <a:lstStyle/>
+                  <a:p>
+                    <a:r>
+                      <a:rPr lang="fr-FR" sz="1600" dirty="0">
+                        <a:latin typeface="Arial" panose="020B0604020202020204" pitchFamily="34" charset="0"/>
+                        <a:cs typeface="Arial" panose="020B0604020202020204" pitchFamily="34" charset="0"/>
+                      </a:rPr>
+                      <a:t>% Resistant</a:t>
+                    </a:r>
+                  </a:p>
+                </p:txBody>
+              </p:sp>
+              <p:sp>
+                <p:nvSpPr>
+                  <p:cNvPr id="38" name="Ellipse 37">
+                    <a:extLst>
+                      <a:ext uri="{FF2B5EF4-FFF2-40B4-BE49-F238E27FC236}">
+                        <a16:creationId xmlns:a16="http://schemas.microsoft.com/office/drawing/2014/main" id="{644C6C82-A9B6-49CC-97ED-9DFDE9B9CD48}"/>
+                      </a:ext>
+                    </a:extLst>
+                  </p:cNvPr>
+                  <p:cNvSpPr/>
+                  <p:nvPr/>
+                </p:nvSpPr>
+                <p:spPr>
+                  <a:xfrm>
+                    <a:off x="78519" y="3361858"/>
+                    <a:ext cx="210820" cy="210821"/>
+                  </a:xfrm>
+                  <a:prstGeom prst="ellipse">
+                    <a:avLst/>
+                  </a:prstGeom>
+                  <a:solidFill>
+                    <a:srgbClr val="23C997"/>
+                  </a:solidFill>
+                  <a:ln>
+                    <a:noFill/>
+                  </a:ln>
+                </p:spPr>
+                <p:style>
+                  <a:lnRef idx="2">
+                    <a:schemeClr val="accent1">
+                      <a:shade val="50000"/>
+                    </a:schemeClr>
+                  </a:lnRef>
+                  <a:fillRef idx="1">
+                    <a:schemeClr val="accent1"/>
+                  </a:fillRef>
+                  <a:effectRef idx="0">
+                    <a:schemeClr val="accent1"/>
+                  </a:effectRef>
+                  <a:fontRef idx="minor">
+                    <a:schemeClr val="lt1"/>
+                  </a:fontRef>
+                </p:style>
+                <p:txBody>
+                  <a:bodyPr rtlCol="0" anchor="ctr"/>
+                  <a:lstStyle/>
+                  <a:p>
+                    <a:pPr algn="ctr"/>
+                    <a:endParaRPr lang="fr-FR" sz="1750" dirty="0">
+                      <a:latin typeface="Arial" panose="020B0604020202020204" pitchFamily="34" charset="0"/>
+                      <a:cs typeface="Arial" panose="020B0604020202020204" pitchFamily="34" charset="0"/>
+                    </a:endParaRPr>
+                  </a:p>
+                </p:txBody>
+              </p:sp>
+              <p:sp>
+                <p:nvSpPr>
+                  <p:cNvPr id="39" name="Ellipse 38">
+                    <a:extLst>
+                      <a:ext uri="{FF2B5EF4-FFF2-40B4-BE49-F238E27FC236}">
+                        <a16:creationId xmlns:a16="http://schemas.microsoft.com/office/drawing/2014/main" id="{1B42492B-9548-4F46-B983-9515BC62A61E}"/>
+                      </a:ext>
+                    </a:extLst>
+                  </p:cNvPr>
+                  <p:cNvSpPr/>
+                  <p:nvPr/>
+                </p:nvSpPr>
+                <p:spPr>
+                  <a:xfrm>
+                    <a:off x="3332763" y="3351544"/>
+                    <a:ext cx="210820" cy="210820"/>
+                  </a:xfrm>
+                  <a:prstGeom prst="ellipse">
+                    <a:avLst/>
+                  </a:prstGeom>
+                  <a:solidFill>
+                    <a:srgbClr val="3E7CA5"/>
+                  </a:solidFill>
+                  <a:ln>
+                    <a:noFill/>
+                  </a:ln>
+                </p:spPr>
+                <p:style>
+                  <a:lnRef idx="2">
+                    <a:schemeClr val="accent1">
+                      <a:shade val="50000"/>
+                    </a:schemeClr>
+                  </a:lnRef>
+                  <a:fillRef idx="1">
+                    <a:schemeClr val="accent1"/>
+                  </a:fillRef>
+                  <a:effectRef idx="0">
+                    <a:schemeClr val="accent1"/>
+                  </a:effectRef>
+                  <a:fontRef idx="minor">
+                    <a:schemeClr val="lt1"/>
+                  </a:fontRef>
+                </p:style>
+                <p:txBody>
+                  <a:bodyPr rtlCol="0" anchor="ctr"/>
+                  <a:lstStyle/>
+                  <a:p>
+                    <a:pPr algn="ctr"/>
+                    <a:endParaRPr lang="fr-FR" sz="1750" dirty="0">
+                      <a:latin typeface="Arial" panose="020B0604020202020204" pitchFamily="34" charset="0"/>
+                      <a:cs typeface="Arial" panose="020B0604020202020204" pitchFamily="34" charset="0"/>
+                    </a:endParaRPr>
+                  </a:p>
+                </p:txBody>
+              </p:sp>
+              <p:sp>
+                <p:nvSpPr>
+                  <p:cNvPr id="40" name="Ellipse 39">
+                    <a:extLst>
+                      <a:ext uri="{FF2B5EF4-FFF2-40B4-BE49-F238E27FC236}">
+                        <a16:creationId xmlns:a16="http://schemas.microsoft.com/office/drawing/2014/main" id="{C534A962-4A5A-48BB-8214-DA5B020BDE3D}"/>
+                      </a:ext>
+                    </a:extLst>
+                  </p:cNvPr>
+                  <p:cNvSpPr/>
+                  <p:nvPr/>
+                </p:nvSpPr>
+                <p:spPr>
+                  <a:xfrm>
+                    <a:off x="7203237" y="3361858"/>
+                    <a:ext cx="210820" cy="210821"/>
+                  </a:xfrm>
+                  <a:prstGeom prst="ellipse">
+                    <a:avLst/>
+                  </a:prstGeom>
+                  <a:solidFill>
+                    <a:srgbClr val="B155A7"/>
+                  </a:solidFill>
+                  <a:ln>
+                    <a:noFill/>
+                  </a:ln>
+                </p:spPr>
+                <p:style>
+                  <a:lnRef idx="2">
+                    <a:schemeClr val="accent1">
+                      <a:shade val="50000"/>
+                    </a:schemeClr>
+                  </a:lnRef>
+                  <a:fillRef idx="1">
+                    <a:schemeClr val="accent1"/>
+                  </a:fillRef>
+                  <a:effectRef idx="0">
+                    <a:schemeClr val="accent1"/>
+                  </a:effectRef>
+                  <a:fontRef idx="minor">
+                    <a:schemeClr val="lt1"/>
+                  </a:fontRef>
+                </p:style>
+                <p:txBody>
+                  <a:bodyPr rtlCol="0" anchor="ctr"/>
+                  <a:lstStyle/>
+                  <a:p>
+                    <a:pPr algn="ctr"/>
+                    <a:endParaRPr lang="fr-FR" sz="1750" dirty="0">
+                      <a:latin typeface="Arial" panose="020B0604020202020204" pitchFamily="34" charset="0"/>
+                      <a:cs typeface="Arial" panose="020B0604020202020204" pitchFamily="34" charset="0"/>
+                    </a:endParaRPr>
+                  </a:p>
+                </p:txBody>
+              </p:sp>
+              <p:sp>
+                <p:nvSpPr>
+                  <p:cNvPr id="41" name="Ellipse 40">
+                    <a:extLst>
+                      <a:ext uri="{FF2B5EF4-FFF2-40B4-BE49-F238E27FC236}">
+                        <a16:creationId xmlns:a16="http://schemas.microsoft.com/office/drawing/2014/main" id="{3C785ED4-332F-4647-AE76-A407F5AEBD77}"/>
+                      </a:ext>
+                    </a:extLst>
+                  </p:cNvPr>
+                  <p:cNvSpPr/>
+                  <p:nvPr/>
+                </p:nvSpPr>
+                <p:spPr>
+                  <a:xfrm>
+                    <a:off x="10765595" y="3361858"/>
+                    <a:ext cx="210820" cy="210821"/>
+                  </a:xfrm>
+                  <a:prstGeom prst="ellipse">
+                    <a:avLst/>
+                  </a:prstGeom>
+                  <a:solidFill>
+                    <a:srgbClr val="FDAC76"/>
+                  </a:solidFill>
+                  <a:ln>
+                    <a:noFill/>
+                  </a:ln>
+                </p:spPr>
+                <p:style>
+                  <a:lnRef idx="2">
+                    <a:schemeClr val="accent1">
+                      <a:shade val="50000"/>
+                    </a:schemeClr>
+                  </a:lnRef>
+                  <a:fillRef idx="1">
+                    <a:schemeClr val="accent1"/>
+                  </a:fillRef>
+                  <a:effectRef idx="0">
+                    <a:schemeClr val="accent1"/>
+                  </a:effectRef>
+                  <a:fontRef idx="minor">
+                    <a:schemeClr val="lt1"/>
+                  </a:fontRef>
+                </p:style>
+                <p:txBody>
+                  <a:bodyPr rtlCol="0" anchor="ctr"/>
+                  <a:lstStyle/>
+                  <a:p>
+                    <a:pPr algn="ctr"/>
+                    <a:endParaRPr lang="fr-FR" sz="1750" dirty="0">
+                      <a:latin typeface="Arial" panose="020B0604020202020204" pitchFamily="34" charset="0"/>
+                      <a:cs typeface="Arial" panose="020B0604020202020204" pitchFamily="34" charset="0"/>
+                    </a:endParaRPr>
+                  </a:p>
+                </p:txBody>
+              </p:sp>
+              <p:sp>
+                <p:nvSpPr>
+                  <p:cNvPr id="42" name="Ellipse 41">
+                    <a:extLst>
+                      <a:ext uri="{FF2B5EF4-FFF2-40B4-BE49-F238E27FC236}">
+                        <a16:creationId xmlns:a16="http://schemas.microsoft.com/office/drawing/2014/main" id="{A3E2D571-D500-408A-8026-174FDB99A2D6}"/>
+                      </a:ext>
+                    </a:extLst>
+                  </p:cNvPr>
+                  <p:cNvSpPr/>
+                  <p:nvPr/>
+                </p:nvSpPr>
+                <p:spPr>
+                  <a:xfrm>
+                    <a:off x="78519" y="3668355"/>
+                    <a:ext cx="210820" cy="210821"/>
+                  </a:xfrm>
+                  <a:prstGeom prst="ellipse">
+                    <a:avLst/>
+                  </a:prstGeom>
+                  <a:solidFill>
+                    <a:srgbClr val="DCB702"/>
+                  </a:solidFill>
+                  <a:ln>
+                    <a:noFill/>
+                  </a:ln>
+                </p:spPr>
+                <p:style>
+                  <a:lnRef idx="2">
+                    <a:schemeClr val="accent1">
+                      <a:shade val="50000"/>
+                    </a:schemeClr>
+                  </a:lnRef>
+                  <a:fillRef idx="1">
+                    <a:schemeClr val="accent1"/>
+                  </a:fillRef>
+                  <a:effectRef idx="0">
+                    <a:schemeClr val="accent1"/>
+                  </a:effectRef>
+                  <a:fontRef idx="minor">
+                    <a:schemeClr val="lt1"/>
+                  </a:fontRef>
+                </p:style>
+                <p:txBody>
+                  <a:bodyPr rtlCol="0" anchor="ctr"/>
+                  <a:lstStyle/>
+                  <a:p>
+                    <a:pPr algn="ctr"/>
+                    <a:endParaRPr lang="fr-FR" sz="1750" dirty="0">
+                      <a:latin typeface="Arial" panose="020B0604020202020204" pitchFamily="34" charset="0"/>
+                      <a:cs typeface="Arial" panose="020B0604020202020204" pitchFamily="34" charset="0"/>
+                    </a:endParaRPr>
+                  </a:p>
+                </p:txBody>
+              </p:sp>
+              <p:sp>
+                <p:nvSpPr>
+                  <p:cNvPr id="43" name="Ellipse 42">
+                    <a:extLst>
+                      <a:ext uri="{FF2B5EF4-FFF2-40B4-BE49-F238E27FC236}">
+                        <a16:creationId xmlns:a16="http://schemas.microsoft.com/office/drawing/2014/main" id="{654F718F-8AA6-4A32-8F47-ED0F732C1D4A}"/>
+                      </a:ext>
+                    </a:extLst>
+                  </p:cNvPr>
+                  <p:cNvSpPr/>
+                  <p:nvPr/>
+                </p:nvSpPr>
+                <p:spPr>
+                  <a:xfrm>
+                    <a:off x="3332763" y="3658041"/>
+                    <a:ext cx="210820" cy="210820"/>
+                  </a:xfrm>
+                  <a:prstGeom prst="ellipse">
+                    <a:avLst/>
+                  </a:prstGeom>
+                  <a:solidFill>
+                    <a:srgbClr val="F2B6EB"/>
+                  </a:solidFill>
+                  <a:ln>
+                    <a:noFill/>
+                  </a:ln>
+                </p:spPr>
+                <p:style>
+                  <a:lnRef idx="2">
+                    <a:schemeClr val="accent1">
+                      <a:shade val="50000"/>
+                    </a:schemeClr>
+                  </a:lnRef>
+                  <a:fillRef idx="1">
+                    <a:schemeClr val="accent1"/>
+                  </a:fillRef>
+                  <a:effectRef idx="0">
+                    <a:schemeClr val="accent1"/>
+                  </a:effectRef>
+                  <a:fontRef idx="minor">
+                    <a:schemeClr val="lt1"/>
+                  </a:fontRef>
+                </p:style>
+                <p:txBody>
+                  <a:bodyPr rtlCol="0" anchor="ctr"/>
+                  <a:lstStyle/>
+                  <a:p>
+                    <a:pPr algn="ctr"/>
+                    <a:endParaRPr lang="fr-FR" sz="1750" dirty="0">
+                      <a:latin typeface="Arial" panose="020B0604020202020204" pitchFamily="34" charset="0"/>
+                      <a:cs typeface="Arial" panose="020B0604020202020204" pitchFamily="34" charset="0"/>
+                    </a:endParaRPr>
+                  </a:p>
+                </p:txBody>
+              </p:sp>
+              <p:sp>
+                <p:nvSpPr>
+                  <p:cNvPr id="44" name="Ellipse 43">
+                    <a:extLst>
+                      <a:ext uri="{FF2B5EF4-FFF2-40B4-BE49-F238E27FC236}">
+                        <a16:creationId xmlns:a16="http://schemas.microsoft.com/office/drawing/2014/main" id="{83C2E6CD-3F02-4E7D-B017-06BEF60FA54E}"/>
+                      </a:ext>
+                    </a:extLst>
+                  </p:cNvPr>
+                  <p:cNvSpPr/>
+                  <p:nvPr/>
+                </p:nvSpPr>
+                <p:spPr>
+                  <a:xfrm>
+                    <a:off x="7203237" y="3668355"/>
+                    <a:ext cx="210820" cy="210821"/>
+                  </a:xfrm>
+                  <a:prstGeom prst="ellipse">
+                    <a:avLst/>
+                  </a:prstGeom>
+                  <a:solidFill>
+                    <a:srgbClr val="62C966"/>
+                  </a:solidFill>
+                  <a:ln>
+                    <a:noFill/>
+                  </a:ln>
+                </p:spPr>
+                <p:style>
+                  <a:lnRef idx="2">
+                    <a:schemeClr val="accent1">
+                      <a:shade val="50000"/>
+                    </a:schemeClr>
+                  </a:lnRef>
+                  <a:fillRef idx="1">
+                    <a:schemeClr val="accent1"/>
+                  </a:fillRef>
+                  <a:effectRef idx="0">
+                    <a:schemeClr val="accent1"/>
+                  </a:effectRef>
+                  <a:fontRef idx="minor">
+                    <a:schemeClr val="lt1"/>
+                  </a:fontRef>
+                </p:style>
+                <p:txBody>
+                  <a:bodyPr rtlCol="0" anchor="ctr"/>
+                  <a:lstStyle/>
+                  <a:p>
+                    <a:pPr algn="ctr"/>
+                    <a:endParaRPr lang="fr-FR" sz="1750" dirty="0">
+                      <a:latin typeface="Arial" panose="020B0604020202020204" pitchFamily="34" charset="0"/>
+                      <a:cs typeface="Arial" panose="020B0604020202020204" pitchFamily="34" charset="0"/>
+                    </a:endParaRPr>
+                  </a:p>
+                </p:txBody>
+              </p:sp>
+              <p:sp>
+                <p:nvSpPr>
+                  <p:cNvPr id="45" name="Ellipse 44">
+                    <a:extLst>
+                      <a:ext uri="{FF2B5EF4-FFF2-40B4-BE49-F238E27FC236}">
+                        <a16:creationId xmlns:a16="http://schemas.microsoft.com/office/drawing/2014/main" id="{EF17DADB-B849-4B26-9E14-C29BC10C31C8}"/>
+                      </a:ext>
+                    </a:extLst>
+                  </p:cNvPr>
+                  <p:cNvSpPr/>
+                  <p:nvPr/>
+                </p:nvSpPr>
+                <p:spPr>
+                  <a:xfrm>
+                    <a:off x="10765595" y="3668355"/>
+                    <a:ext cx="210820" cy="210821"/>
+                  </a:xfrm>
+                  <a:prstGeom prst="ellipse">
+                    <a:avLst/>
+                  </a:prstGeom>
+                  <a:solidFill>
+                    <a:srgbClr val="FF7F40"/>
+                  </a:solidFill>
+                  <a:ln>
+                    <a:noFill/>
+                  </a:ln>
+                </p:spPr>
+                <p:style>
+                  <a:lnRef idx="2">
+                    <a:schemeClr val="accent1">
+                      <a:shade val="50000"/>
+                    </a:schemeClr>
+                  </a:lnRef>
+                  <a:fillRef idx="1">
+                    <a:schemeClr val="accent1"/>
+                  </a:fillRef>
+                  <a:effectRef idx="0">
+                    <a:schemeClr val="accent1"/>
+                  </a:effectRef>
+                  <a:fontRef idx="minor">
+                    <a:schemeClr val="lt1"/>
+                  </a:fontRef>
+                </p:style>
+                <p:txBody>
+                  <a:bodyPr rtlCol="0" anchor="ctr"/>
+                  <a:lstStyle/>
+                  <a:p>
+                    <a:pPr algn="ctr"/>
+                    <a:endParaRPr lang="fr-FR" sz="1750" dirty="0">
+                      <a:latin typeface="Arial" panose="020B0604020202020204" pitchFamily="34" charset="0"/>
+                      <a:cs typeface="Arial" panose="020B0604020202020204" pitchFamily="34" charset="0"/>
+                    </a:endParaRPr>
+                  </a:p>
+                </p:txBody>
+              </p:sp>
+              <p:sp>
+                <p:nvSpPr>
+                  <p:cNvPr id="46" name="Ellipse 45">
+                    <a:extLst>
+                      <a:ext uri="{FF2B5EF4-FFF2-40B4-BE49-F238E27FC236}">
+                        <a16:creationId xmlns:a16="http://schemas.microsoft.com/office/drawing/2014/main" id="{F08DFCD7-F8B5-4689-BF10-B2B6B382C2B8}"/>
+                      </a:ext>
+                    </a:extLst>
+                  </p:cNvPr>
+                  <p:cNvSpPr/>
+                  <p:nvPr/>
+                </p:nvSpPr>
+                <p:spPr>
+                  <a:xfrm>
+                    <a:off x="78519" y="3966357"/>
+                    <a:ext cx="210820" cy="210821"/>
+                  </a:xfrm>
+                  <a:prstGeom prst="ellipse">
+                    <a:avLst/>
+                  </a:prstGeom>
+                  <a:solidFill>
+                    <a:srgbClr val="7EC8E3"/>
+                  </a:solidFill>
+                  <a:ln>
+                    <a:noFill/>
+                  </a:ln>
+                </p:spPr>
+                <p:style>
+                  <a:lnRef idx="2">
+                    <a:schemeClr val="accent1">
+                      <a:shade val="50000"/>
+                    </a:schemeClr>
+                  </a:lnRef>
+                  <a:fillRef idx="1">
+                    <a:schemeClr val="accent1"/>
+                  </a:fillRef>
+                  <a:effectRef idx="0">
+                    <a:schemeClr val="accent1"/>
+                  </a:effectRef>
+                  <a:fontRef idx="minor">
+                    <a:schemeClr val="lt1"/>
+                  </a:fontRef>
+                </p:style>
+                <p:txBody>
+                  <a:bodyPr rtlCol="0" anchor="ctr"/>
+                  <a:lstStyle/>
+                  <a:p>
+                    <a:pPr algn="ctr"/>
+                    <a:endParaRPr lang="fr-FR" sz="1750" dirty="0">
+                      <a:latin typeface="Arial" panose="020B0604020202020204" pitchFamily="34" charset="0"/>
+                      <a:cs typeface="Arial" panose="020B0604020202020204" pitchFamily="34" charset="0"/>
+                    </a:endParaRPr>
+                  </a:p>
+                </p:txBody>
+              </p:sp>
+              <p:sp>
+                <p:nvSpPr>
+                  <p:cNvPr id="47" name="Ellipse 46">
+                    <a:extLst>
+                      <a:ext uri="{FF2B5EF4-FFF2-40B4-BE49-F238E27FC236}">
+                        <a16:creationId xmlns:a16="http://schemas.microsoft.com/office/drawing/2014/main" id="{AF9068CC-8FB6-45F6-8998-F0D8BC4A4ADA}"/>
+                      </a:ext>
+                    </a:extLst>
+                  </p:cNvPr>
+                  <p:cNvSpPr/>
+                  <p:nvPr/>
+                </p:nvSpPr>
+                <p:spPr>
+                  <a:xfrm>
+                    <a:off x="3332763" y="3956043"/>
+                    <a:ext cx="210820" cy="210820"/>
+                  </a:xfrm>
+                  <a:prstGeom prst="ellipse">
+                    <a:avLst/>
+                  </a:prstGeom>
+                  <a:solidFill>
+                    <a:srgbClr val="D38ACB"/>
+                  </a:solidFill>
+                  <a:ln>
+                    <a:noFill/>
+                  </a:ln>
+                </p:spPr>
+                <p:style>
+                  <a:lnRef idx="2">
+                    <a:schemeClr val="accent1">
+                      <a:shade val="50000"/>
+                    </a:schemeClr>
+                  </a:lnRef>
+                  <a:fillRef idx="1">
+                    <a:schemeClr val="accent1"/>
+                  </a:fillRef>
+                  <a:effectRef idx="0">
+                    <a:schemeClr val="accent1"/>
+                  </a:effectRef>
+                  <a:fontRef idx="minor">
+                    <a:schemeClr val="lt1"/>
+                  </a:fontRef>
+                </p:style>
+                <p:txBody>
+                  <a:bodyPr rtlCol="0" anchor="ctr"/>
+                  <a:lstStyle/>
+                  <a:p>
+                    <a:pPr algn="ctr"/>
+                    <a:endParaRPr lang="fr-FR" sz="1750" dirty="0">
+                      <a:latin typeface="Arial" panose="020B0604020202020204" pitchFamily="34" charset="0"/>
+                      <a:cs typeface="Arial" panose="020B0604020202020204" pitchFamily="34" charset="0"/>
+                    </a:endParaRPr>
+                  </a:p>
+                </p:txBody>
+              </p:sp>
+              <p:sp>
+                <p:nvSpPr>
+                  <p:cNvPr id="48" name="Ellipse 47">
+                    <a:extLst>
+                      <a:ext uri="{FF2B5EF4-FFF2-40B4-BE49-F238E27FC236}">
+                        <a16:creationId xmlns:a16="http://schemas.microsoft.com/office/drawing/2014/main" id="{F5DBDD97-F57E-4C03-B5AE-16C716C8EDF8}"/>
+                      </a:ext>
+                    </a:extLst>
+                  </p:cNvPr>
+                  <p:cNvSpPr/>
+                  <p:nvPr/>
+                </p:nvSpPr>
+                <p:spPr>
+                  <a:xfrm>
+                    <a:off x="7203237" y="3966357"/>
+                    <a:ext cx="210820" cy="210821"/>
+                  </a:xfrm>
+                  <a:prstGeom prst="ellipse">
+                    <a:avLst/>
+                  </a:prstGeom>
+                  <a:solidFill>
+                    <a:srgbClr val="EE637F"/>
+                  </a:solidFill>
+                  <a:ln>
+                    <a:noFill/>
+                  </a:ln>
+                </p:spPr>
+                <p:style>
+                  <a:lnRef idx="2">
+                    <a:schemeClr val="accent1">
+                      <a:shade val="50000"/>
+                    </a:schemeClr>
+                  </a:lnRef>
+                  <a:fillRef idx="1">
+                    <a:schemeClr val="accent1"/>
+                  </a:fillRef>
+                  <a:effectRef idx="0">
+                    <a:schemeClr val="accent1"/>
+                  </a:effectRef>
+                  <a:fontRef idx="minor">
+                    <a:schemeClr val="lt1"/>
+                  </a:fontRef>
+                </p:style>
+                <p:txBody>
+                  <a:bodyPr rtlCol="0" anchor="ctr"/>
+                  <a:lstStyle/>
+                  <a:p>
+                    <a:pPr algn="ctr"/>
+                    <a:endParaRPr lang="fr-FR" sz="1750" dirty="0">
+                      <a:latin typeface="Arial" panose="020B0604020202020204" pitchFamily="34" charset="0"/>
+                      <a:cs typeface="Arial" panose="020B0604020202020204" pitchFamily="34" charset="0"/>
+                    </a:endParaRPr>
+                  </a:p>
+                </p:txBody>
+              </p:sp>
+              <p:sp>
+                <p:nvSpPr>
+                  <p:cNvPr id="49" name="Ellipse 48">
+                    <a:extLst>
+                      <a:ext uri="{FF2B5EF4-FFF2-40B4-BE49-F238E27FC236}">
+                        <a16:creationId xmlns:a16="http://schemas.microsoft.com/office/drawing/2014/main" id="{FB427A11-76F0-4C62-A283-EAF0E82E261C}"/>
+                      </a:ext>
+                    </a:extLst>
+                  </p:cNvPr>
+                  <p:cNvSpPr/>
+                  <p:nvPr/>
+                </p:nvSpPr>
+                <p:spPr>
+                  <a:xfrm>
+                    <a:off x="10765595" y="3966357"/>
+                    <a:ext cx="210820" cy="210821"/>
+                  </a:xfrm>
+                  <a:prstGeom prst="ellipse">
+                    <a:avLst/>
+                  </a:prstGeom>
+                  <a:solidFill>
+                    <a:srgbClr val="BCED54"/>
+                  </a:solidFill>
+                  <a:ln>
+                    <a:noFill/>
+                  </a:ln>
+                </p:spPr>
+                <p:style>
+                  <a:lnRef idx="2">
+                    <a:schemeClr val="accent1">
+                      <a:shade val="50000"/>
+                    </a:schemeClr>
+                  </a:lnRef>
+                  <a:fillRef idx="1">
+                    <a:schemeClr val="accent1"/>
+                  </a:fillRef>
+                  <a:effectRef idx="0">
+                    <a:schemeClr val="accent1"/>
+                  </a:effectRef>
+                  <a:fontRef idx="minor">
+                    <a:schemeClr val="lt1"/>
+                  </a:fontRef>
+                </p:style>
+                <p:txBody>
+                  <a:bodyPr rtlCol="0" anchor="ctr"/>
+                  <a:lstStyle/>
+                  <a:p>
+                    <a:pPr algn="ctr"/>
+                    <a:endParaRPr lang="fr-FR" sz="1750" dirty="0">
+                      <a:latin typeface="Arial" panose="020B0604020202020204" pitchFamily="34" charset="0"/>
+                      <a:cs typeface="Arial" panose="020B0604020202020204" pitchFamily="34" charset="0"/>
+                    </a:endParaRPr>
+                  </a:p>
+                </p:txBody>
+              </p:sp>
+              <p:sp>
+                <p:nvSpPr>
+                  <p:cNvPr id="50" name="ZoneTexte 49">
+                    <a:extLst>
+                      <a:ext uri="{FF2B5EF4-FFF2-40B4-BE49-F238E27FC236}">
+                        <a16:creationId xmlns:a16="http://schemas.microsoft.com/office/drawing/2014/main" id="{7DDD9FFA-5212-4D68-8671-603283CACB22}"/>
+                      </a:ext>
+                    </a:extLst>
+                  </p:cNvPr>
+                  <p:cNvSpPr txBox="1"/>
+                  <p:nvPr/>
+                </p:nvSpPr>
+                <p:spPr>
+                  <a:xfrm>
+                    <a:off x="336006" y="3277035"/>
+                    <a:ext cx="2361676" cy="338554"/>
+                  </a:xfrm>
+                  <a:prstGeom prst="rect">
+                    <a:avLst/>
+                  </a:prstGeom>
+                  <a:noFill/>
+                </p:spPr>
+                <p:txBody>
+                  <a:bodyPr wrap="square" rtlCol="0">
+                    <a:spAutoFit/>
+                  </a:bodyPr>
+                  <a:lstStyle/>
+                  <a:p>
+                    <a:r>
+                      <a:rPr lang="fr-FR" sz="1556" spc="-49" dirty="0">
+                        <a:latin typeface="Arial" panose="020B0604020202020204" pitchFamily="34" charset="0"/>
+                        <a:cs typeface="Arial" panose="020B0604020202020204" pitchFamily="34" charset="0"/>
+                      </a:rPr>
+                      <a:t>Aminoglycoside</a:t>
+                    </a:r>
+                  </a:p>
+                </p:txBody>
+              </p:sp>
+              <p:sp>
+                <p:nvSpPr>
+                  <p:cNvPr id="51" name="ZoneTexte 50">
+                    <a:extLst>
+                      <a:ext uri="{FF2B5EF4-FFF2-40B4-BE49-F238E27FC236}">
+                        <a16:creationId xmlns:a16="http://schemas.microsoft.com/office/drawing/2014/main" id="{4FE7616A-DCAE-496C-8A3C-E566758E8A04}"/>
+                      </a:ext>
+                    </a:extLst>
+                  </p:cNvPr>
+                  <p:cNvSpPr txBox="1"/>
+                  <p:nvPr/>
+                </p:nvSpPr>
+                <p:spPr>
+                  <a:xfrm>
+                    <a:off x="336006" y="3597456"/>
+                    <a:ext cx="2361676" cy="338554"/>
+                  </a:xfrm>
+                  <a:prstGeom prst="rect">
+                    <a:avLst/>
+                  </a:prstGeom>
+                  <a:noFill/>
+                </p:spPr>
+                <p:txBody>
+                  <a:bodyPr wrap="square" rtlCol="0">
+                    <a:spAutoFit/>
+                  </a:bodyPr>
+                  <a:lstStyle/>
+                  <a:p>
+                    <a:r>
+                      <a:rPr lang="fr-FR" sz="1556" spc="-49" dirty="0">
+                        <a:latin typeface="Arial" panose="020B0604020202020204" pitchFamily="34" charset="0"/>
+                        <a:cs typeface="Arial" panose="020B0604020202020204" pitchFamily="34" charset="0"/>
+                      </a:rPr>
+                      <a:t>Other</a:t>
+                    </a:r>
+                  </a:p>
+                </p:txBody>
+              </p:sp>
+              <p:sp>
+                <p:nvSpPr>
+                  <p:cNvPr id="52" name="ZoneTexte 51">
+                    <a:extLst>
+                      <a:ext uri="{FF2B5EF4-FFF2-40B4-BE49-F238E27FC236}">
+                        <a16:creationId xmlns:a16="http://schemas.microsoft.com/office/drawing/2014/main" id="{6A267759-F104-410F-A2C8-39BC459DD88D}"/>
+                      </a:ext>
+                    </a:extLst>
+                  </p:cNvPr>
+                  <p:cNvSpPr txBox="1"/>
+                  <p:nvPr/>
+                </p:nvSpPr>
+                <p:spPr>
+                  <a:xfrm>
+                    <a:off x="336006" y="3917878"/>
+                    <a:ext cx="2679403" cy="338554"/>
+                  </a:xfrm>
+                  <a:prstGeom prst="rect">
+                    <a:avLst/>
+                  </a:prstGeom>
+                  <a:noFill/>
+                </p:spPr>
+                <p:txBody>
+                  <a:bodyPr wrap="square" rtlCol="0">
+                    <a:spAutoFit/>
+                  </a:bodyPr>
+                  <a:lstStyle/>
+                  <a:p>
+                    <a:r>
+                      <a:rPr lang="fr-FR" sz="1556" spc="-49" dirty="0">
+                        <a:latin typeface="Arial" panose="020B0604020202020204" pitchFamily="34" charset="0"/>
+                        <a:cs typeface="Arial" panose="020B0604020202020204" pitchFamily="34" charset="0"/>
+                      </a:rPr>
+                      <a:t>Large spectrum penicillin</a:t>
+                    </a:r>
+                  </a:p>
+                </p:txBody>
+              </p:sp>
+              <p:sp>
+                <p:nvSpPr>
+                  <p:cNvPr id="53" name="ZoneTexte 52">
+                    <a:extLst>
+                      <a:ext uri="{FF2B5EF4-FFF2-40B4-BE49-F238E27FC236}">
+                        <a16:creationId xmlns:a16="http://schemas.microsoft.com/office/drawing/2014/main" id="{B2A9B365-7BF0-4C8A-ACC9-1D623FA8077C}"/>
+                      </a:ext>
+                    </a:extLst>
+                  </p:cNvPr>
+                  <p:cNvSpPr txBox="1"/>
+                  <p:nvPr/>
+                </p:nvSpPr>
+                <p:spPr>
+                  <a:xfrm>
+                    <a:off x="3543585" y="3277035"/>
+                    <a:ext cx="3698811" cy="402368"/>
+                  </a:xfrm>
+                  <a:prstGeom prst="rect">
+                    <a:avLst/>
+                  </a:prstGeom>
+                  <a:noFill/>
+                </p:spPr>
+                <p:txBody>
+                  <a:bodyPr wrap="square" rtlCol="0">
+                    <a:spAutoFit/>
+                  </a:bodyPr>
+                  <a:lstStyle/>
+                  <a:p>
+                    <a:r>
+                      <a:rPr lang="fr-FR" sz="1556" spc="-49" dirty="0">
+                        <a:latin typeface="Arial" panose="020B0604020202020204" pitchFamily="34" charset="0"/>
+                        <a:cs typeface="Arial" panose="020B0604020202020204" pitchFamily="34" charset="0"/>
+                      </a:rPr>
+                      <a:t>Penicillin + beta-lactamase inhibitor</a:t>
+                    </a:r>
+                  </a:p>
+                </p:txBody>
+              </p:sp>
+              <p:sp>
+                <p:nvSpPr>
+                  <p:cNvPr id="54" name="ZoneTexte 53">
+                    <a:extLst>
+                      <a:ext uri="{FF2B5EF4-FFF2-40B4-BE49-F238E27FC236}">
+                        <a16:creationId xmlns:a16="http://schemas.microsoft.com/office/drawing/2014/main" id="{0029A159-43D2-4BCB-86E3-B37AE9CA4B34}"/>
+                      </a:ext>
+                    </a:extLst>
+                  </p:cNvPr>
+                  <p:cNvSpPr txBox="1"/>
+                  <p:nvPr/>
+                </p:nvSpPr>
+                <p:spPr>
+                  <a:xfrm>
+                    <a:off x="3526381" y="3597456"/>
+                    <a:ext cx="3390378" cy="402368"/>
+                  </a:xfrm>
+                  <a:prstGeom prst="rect">
+                    <a:avLst/>
+                  </a:prstGeom>
+                  <a:noFill/>
+                </p:spPr>
+                <p:txBody>
+                  <a:bodyPr wrap="square" rtlCol="0">
+                    <a:spAutoFit/>
+                  </a:bodyPr>
+                  <a:lstStyle/>
+                  <a:p>
+                    <a:r>
+                      <a:rPr lang="fr-FR" sz="1556" spc="-49" dirty="0">
+                        <a:latin typeface="Arial" panose="020B0604020202020204" pitchFamily="34" charset="0"/>
+                        <a:cs typeface="Arial" panose="020B0604020202020204" pitchFamily="34" charset="0"/>
+                      </a:rPr>
+                      <a:t>Second gen. cephalosporin</a:t>
+                    </a:r>
+                  </a:p>
+                </p:txBody>
+              </p:sp>
+              <p:sp>
+                <p:nvSpPr>
+                  <p:cNvPr id="55" name="ZoneTexte 54">
+                    <a:extLst>
+                      <a:ext uri="{FF2B5EF4-FFF2-40B4-BE49-F238E27FC236}">
+                        <a16:creationId xmlns:a16="http://schemas.microsoft.com/office/drawing/2014/main" id="{014BD64E-23A8-4725-A2E5-1D4C5D6A572C}"/>
+                      </a:ext>
+                    </a:extLst>
+                  </p:cNvPr>
+                  <p:cNvSpPr txBox="1"/>
+                  <p:nvPr/>
+                </p:nvSpPr>
+                <p:spPr>
+                  <a:xfrm>
+                    <a:off x="3526381" y="3917878"/>
+                    <a:ext cx="3390378" cy="402368"/>
+                  </a:xfrm>
+                  <a:prstGeom prst="rect">
+                    <a:avLst/>
+                  </a:prstGeom>
+                  <a:noFill/>
+                </p:spPr>
+                <p:txBody>
+                  <a:bodyPr wrap="square" rtlCol="0">
+                    <a:spAutoFit/>
+                  </a:bodyPr>
+                  <a:lstStyle/>
+                  <a:p>
+                    <a:r>
+                      <a:rPr lang="fr-FR" sz="1556" spc="-49" dirty="0">
+                        <a:latin typeface="Arial" panose="020B0604020202020204" pitchFamily="34" charset="0"/>
+                        <a:cs typeface="Arial" panose="020B0604020202020204" pitchFamily="34" charset="0"/>
+                      </a:rPr>
+                      <a:t>Third gen. cephalosporin</a:t>
+                    </a:r>
+                  </a:p>
+                </p:txBody>
+              </p:sp>
+              <p:sp>
+                <p:nvSpPr>
+                  <p:cNvPr id="56" name="ZoneTexte 55">
+                    <a:extLst>
+                      <a:ext uri="{FF2B5EF4-FFF2-40B4-BE49-F238E27FC236}">
+                        <a16:creationId xmlns:a16="http://schemas.microsoft.com/office/drawing/2014/main" id="{3EEA21DB-7915-44A4-A44F-6FA06EC42606}"/>
+                      </a:ext>
+                    </a:extLst>
+                  </p:cNvPr>
+                  <p:cNvSpPr txBox="1"/>
+                  <p:nvPr/>
+                </p:nvSpPr>
+                <p:spPr>
+                  <a:xfrm>
+                    <a:off x="7461396" y="3325515"/>
+                    <a:ext cx="3148220" cy="338554"/>
+                  </a:xfrm>
+                  <a:prstGeom prst="rect">
+                    <a:avLst/>
+                  </a:prstGeom>
+                  <a:noFill/>
+                </p:spPr>
+                <p:txBody>
+                  <a:bodyPr wrap="square" rtlCol="0">
+                    <a:spAutoFit/>
+                  </a:bodyPr>
+                  <a:lstStyle/>
+                  <a:p>
+                    <a:r>
+                      <a:rPr lang="fr-FR" sz="1556" spc="-49" dirty="0" err="1">
+                        <a:latin typeface="Arial" panose="020B0604020202020204" pitchFamily="34" charset="0"/>
+                        <a:cs typeface="Arial" panose="020B0604020202020204" pitchFamily="34" charset="0"/>
+                      </a:rPr>
+                      <a:t>Fourth</a:t>
+                    </a:r>
+                    <a:r>
+                      <a:rPr lang="fr-FR" sz="1556" spc="-49" dirty="0">
+                        <a:latin typeface="Arial" panose="020B0604020202020204" pitchFamily="34" charset="0"/>
+                        <a:cs typeface="Arial" panose="020B0604020202020204" pitchFamily="34" charset="0"/>
+                      </a:rPr>
+                      <a:t> gen. cephalosporin</a:t>
+                    </a:r>
+                  </a:p>
+                </p:txBody>
+              </p:sp>
+              <p:sp>
+                <p:nvSpPr>
+                  <p:cNvPr id="57" name="ZoneTexte 56">
+                    <a:extLst>
+                      <a:ext uri="{FF2B5EF4-FFF2-40B4-BE49-F238E27FC236}">
+                        <a16:creationId xmlns:a16="http://schemas.microsoft.com/office/drawing/2014/main" id="{89F4838D-C24F-47AC-8626-789D492C1DF2}"/>
+                      </a:ext>
+                    </a:extLst>
+                  </p:cNvPr>
+                  <p:cNvSpPr txBox="1"/>
+                  <p:nvPr/>
+                </p:nvSpPr>
+                <p:spPr>
+                  <a:xfrm>
+                    <a:off x="7491011" y="3615926"/>
+                    <a:ext cx="2361676" cy="338554"/>
+                  </a:xfrm>
+                  <a:prstGeom prst="rect">
+                    <a:avLst/>
+                  </a:prstGeom>
+                  <a:noFill/>
+                </p:spPr>
+                <p:txBody>
+                  <a:bodyPr wrap="square" rtlCol="0">
+                    <a:spAutoFit/>
+                  </a:bodyPr>
+                  <a:lstStyle/>
+                  <a:p>
+                    <a:r>
+                      <a:rPr lang="fr-FR" sz="1556" spc="-49" dirty="0">
+                        <a:latin typeface="Arial" panose="020B0604020202020204" pitchFamily="34" charset="0"/>
+                        <a:cs typeface="Arial" panose="020B0604020202020204" pitchFamily="34" charset="0"/>
+                      </a:rPr>
+                      <a:t>Carbapenem</a:t>
+                    </a:r>
+                  </a:p>
+                </p:txBody>
+              </p:sp>
+              <p:sp>
+                <p:nvSpPr>
+                  <p:cNvPr id="58" name="ZoneTexte 57">
+                    <a:extLst>
+                      <a:ext uri="{FF2B5EF4-FFF2-40B4-BE49-F238E27FC236}">
+                        <a16:creationId xmlns:a16="http://schemas.microsoft.com/office/drawing/2014/main" id="{0C9C5D11-99CA-4E56-A3CA-64FEE224708F}"/>
+                      </a:ext>
+                    </a:extLst>
+                  </p:cNvPr>
+                  <p:cNvSpPr txBox="1"/>
+                  <p:nvPr/>
+                </p:nvSpPr>
+                <p:spPr>
+                  <a:xfrm>
+                    <a:off x="7491012" y="3936347"/>
+                    <a:ext cx="2763612" cy="338554"/>
+                  </a:xfrm>
+                  <a:prstGeom prst="rect">
+                    <a:avLst/>
+                  </a:prstGeom>
+                  <a:noFill/>
+                </p:spPr>
+                <p:txBody>
+                  <a:bodyPr wrap="square" rtlCol="0">
+                    <a:spAutoFit/>
+                  </a:bodyPr>
+                  <a:lstStyle/>
+                  <a:p>
+                    <a:r>
+                      <a:rPr lang="fr-FR" sz="1556" spc="-49" dirty="0">
+                        <a:latin typeface="Arial" panose="020B0604020202020204" pitchFamily="34" charset="0"/>
+                        <a:cs typeface="Arial" panose="020B0604020202020204" pitchFamily="34" charset="0"/>
+                      </a:rPr>
+                      <a:t>Nitrofuran derivative</a:t>
+                    </a:r>
+                  </a:p>
+                </p:txBody>
+              </p:sp>
+              <p:sp>
+                <p:nvSpPr>
+                  <p:cNvPr id="59" name="ZoneTexte 58">
+                    <a:extLst>
+                      <a:ext uri="{FF2B5EF4-FFF2-40B4-BE49-F238E27FC236}">
+                        <a16:creationId xmlns:a16="http://schemas.microsoft.com/office/drawing/2014/main" id="{6849EDBE-3E85-467A-B6D2-161D5C1F5D70}"/>
+                      </a:ext>
+                    </a:extLst>
+                  </p:cNvPr>
+                  <p:cNvSpPr txBox="1"/>
+                  <p:nvPr/>
+                </p:nvSpPr>
+                <p:spPr>
+                  <a:xfrm>
+                    <a:off x="11024091" y="3304047"/>
+                    <a:ext cx="2361676" cy="338554"/>
+                  </a:xfrm>
+                  <a:prstGeom prst="rect">
+                    <a:avLst/>
+                  </a:prstGeom>
+                  <a:noFill/>
+                </p:spPr>
+                <p:txBody>
+                  <a:bodyPr wrap="square" rtlCol="0">
+                    <a:spAutoFit/>
+                  </a:bodyPr>
+                  <a:lstStyle/>
+                  <a:p>
+                    <a:r>
+                      <a:rPr lang="fr-FR" sz="1556" spc="-49" dirty="0">
+                        <a:latin typeface="Arial" panose="020B0604020202020204" pitchFamily="34" charset="0"/>
+                        <a:cs typeface="Arial" panose="020B0604020202020204" pitchFamily="34" charset="0"/>
+                      </a:rPr>
+                      <a:t>Fluoroquinolone</a:t>
+                    </a:r>
+                  </a:p>
+                </p:txBody>
+              </p:sp>
+              <p:sp>
+                <p:nvSpPr>
+                  <p:cNvPr id="60" name="ZoneTexte 59">
+                    <a:extLst>
+                      <a:ext uri="{FF2B5EF4-FFF2-40B4-BE49-F238E27FC236}">
+                        <a16:creationId xmlns:a16="http://schemas.microsoft.com/office/drawing/2014/main" id="{ADC20234-7996-4817-8C4D-2AB6CDDC3216}"/>
+                      </a:ext>
+                    </a:extLst>
+                  </p:cNvPr>
+                  <p:cNvSpPr txBox="1"/>
+                  <p:nvPr/>
+                </p:nvSpPr>
+                <p:spPr>
+                  <a:xfrm>
+                    <a:off x="11024091" y="3624468"/>
+                    <a:ext cx="2361676" cy="338554"/>
+                  </a:xfrm>
+                  <a:prstGeom prst="rect">
+                    <a:avLst/>
+                  </a:prstGeom>
+                  <a:noFill/>
+                </p:spPr>
+                <p:txBody>
+                  <a:bodyPr wrap="square" rtlCol="0">
+                    <a:spAutoFit/>
+                  </a:bodyPr>
+                  <a:lstStyle/>
+                  <a:p>
+                    <a:r>
+                      <a:rPr lang="fr-FR" sz="1556" spc="-49" dirty="0">
+                        <a:latin typeface="Arial" panose="020B0604020202020204" pitchFamily="34" charset="0"/>
+                        <a:cs typeface="Arial" panose="020B0604020202020204" pitchFamily="34" charset="0"/>
+                      </a:rPr>
+                      <a:t>Other quinolone</a:t>
+                    </a:r>
+                  </a:p>
+                </p:txBody>
+              </p:sp>
+              <p:sp>
+                <p:nvSpPr>
+                  <p:cNvPr id="61" name="ZoneTexte 60">
+                    <a:extLst>
+                      <a:ext uri="{FF2B5EF4-FFF2-40B4-BE49-F238E27FC236}">
+                        <a16:creationId xmlns:a16="http://schemas.microsoft.com/office/drawing/2014/main" id="{44B33ED0-BA8E-4C19-94B1-379FBA15DD92}"/>
+                      </a:ext>
+                    </a:extLst>
+                  </p:cNvPr>
+                  <p:cNvSpPr txBox="1"/>
+                  <p:nvPr/>
+                </p:nvSpPr>
+                <p:spPr>
+                  <a:xfrm>
+                    <a:off x="11024092" y="3944887"/>
+                    <a:ext cx="3886872" cy="338554"/>
+                  </a:xfrm>
+                  <a:prstGeom prst="rect">
+                    <a:avLst/>
+                  </a:prstGeom>
+                  <a:noFill/>
+                </p:spPr>
+                <p:txBody>
+                  <a:bodyPr wrap="square" rtlCol="0">
+                    <a:spAutoFit/>
+                  </a:bodyPr>
+                  <a:lstStyle/>
+                  <a:p>
+                    <a:r>
+                      <a:rPr lang="fr-FR" sz="1556" spc="-49" dirty="0" err="1">
+                        <a:latin typeface="Arial" panose="020B0604020202020204" pitchFamily="34" charset="0"/>
+                        <a:cs typeface="Arial" panose="020B0604020202020204" pitchFamily="34" charset="0"/>
+                      </a:rPr>
+                      <a:t>Trimethoprim</a:t>
+                    </a:r>
+                    <a:r>
+                      <a:rPr lang="fr-FR" sz="1556" spc="-49" dirty="0">
+                        <a:latin typeface="Arial" panose="020B0604020202020204" pitchFamily="34" charset="0"/>
+                        <a:cs typeface="Arial" panose="020B0604020202020204" pitchFamily="34" charset="0"/>
+                      </a:rPr>
+                      <a:t>/ </a:t>
+                    </a:r>
+                    <a:r>
+                      <a:rPr lang="fr-FR" sz="1556" spc="-49" dirty="0" err="1">
+                        <a:latin typeface="Arial" panose="020B0604020202020204" pitchFamily="34" charset="0"/>
+                        <a:cs typeface="Arial" panose="020B0604020202020204" pitchFamily="34" charset="0"/>
+                      </a:rPr>
+                      <a:t>Sulfamethoxazole</a:t>
+                    </a:r>
+                    <a:endParaRPr lang="fr-FR" sz="1556" spc="-49" dirty="0">
+                      <a:latin typeface="Arial" panose="020B0604020202020204" pitchFamily="34" charset="0"/>
+                      <a:cs typeface="Arial" panose="020B0604020202020204" pitchFamily="34" charset="0"/>
+                    </a:endParaRPr>
+                  </a:p>
+                </p:txBody>
+              </p:sp>
+            </p:grpSp>
+            <p:sp>
+              <p:nvSpPr>
+                <p:cNvPr id="30" name="ZoneTexte 29">
+                  <a:extLst>
+                    <a:ext uri="{FF2B5EF4-FFF2-40B4-BE49-F238E27FC236}">
+                      <a16:creationId xmlns:a16="http://schemas.microsoft.com/office/drawing/2014/main" id="{59D8E02B-66FF-4949-84B0-C90273DBDC4E}"/>
+                    </a:ext>
+                  </a:extLst>
+                </p:cNvPr>
+                <p:cNvSpPr txBox="1"/>
+                <p:nvPr/>
+              </p:nvSpPr>
+              <p:spPr>
+                <a:xfrm>
+                  <a:off x="15474159" y="13042236"/>
+                  <a:ext cx="2242604" cy="410611"/>
+                </a:xfrm>
+                <a:prstGeom prst="rect">
+                  <a:avLst/>
+                </a:prstGeom>
+                <a:noFill/>
+              </p:spPr>
+              <p:txBody>
+                <a:bodyPr wrap="square">
+                  <a:spAutoFit/>
+                </a:bodyPr>
+                <a:lstStyle/>
+                <a:p>
+                  <a:r>
+                    <a:rPr lang="fr-FR" sz="1600" b="1" dirty="0">
+                      <a:solidFill>
+                        <a:sysClr val="windowText" lastClr="000000"/>
+                      </a:solidFill>
+                      <a:latin typeface="Arial" panose="020B0604020202020204" pitchFamily="34" charset="0"/>
+                      <a:cs typeface="Arial" panose="020B0604020202020204" pitchFamily="34" charset="0"/>
+                    </a:rPr>
+                    <a:t>Node Pie chart: </a:t>
+                  </a:r>
+                </a:p>
+              </p:txBody>
+            </p:sp>
+          </p:grpSp>
+          <p:sp>
+            <p:nvSpPr>
+              <p:cNvPr id="28" name="ZoneTexte 27">
+                <a:extLst>
+                  <a:ext uri="{FF2B5EF4-FFF2-40B4-BE49-F238E27FC236}">
+                    <a16:creationId xmlns:a16="http://schemas.microsoft.com/office/drawing/2014/main" id="{FB57FCFB-011E-43CA-B391-16B061ECF830}"/>
+                  </a:ext>
+                </a:extLst>
+              </p:cNvPr>
+              <p:cNvSpPr txBox="1"/>
+              <p:nvPr/>
+            </p:nvSpPr>
+            <p:spPr>
+              <a:xfrm>
+                <a:off x="20807128" y="13580619"/>
+                <a:ext cx="3886830" cy="410611"/>
+              </a:xfrm>
+              <a:prstGeom prst="rect">
+                <a:avLst/>
+              </a:prstGeom>
+              <a:noFill/>
+            </p:spPr>
+            <p:txBody>
+              <a:bodyPr wrap="square">
+                <a:spAutoFit/>
+              </a:bodyPr>
+              <a:lstStyle/>
+              <a:p>
+                <a:pPr algn="ctr"/>
+                <a:r>
+                  <a:rPr lang="fr-FR" sz="1600" b="1" dirty="0">
+                    <a:solidFill>
+                      <a:sysClr val="windowText" lastClr="000000"/>
+                    </a:solidFill>
+                    <a:latin typeface="Arial" panose="020B0604020202020204" pitchFamily="34" charset="0"/>
+                    <a:cs typeface="Arial" panose="020B0604020202020204" pitchFamily="34" charset="0"/>
+                  </a:rPr>
+                  <a:t>Node color: antibiotic class</a:t>
+                </a:r>
+              </a:p>
+            </p:txBody>
+          </p:sp>
+        </p:grpSp>
+        <p:grpSp>
+          <p:nvGrpSpPr>
+            <p:cNvPr id="62" name="Groupe 61">
+              <a:extLst>
+                <a:ext uri="{FF2B5EF4-FFF2-40B4-BE49-F238E27FC236}">
+                  <a16:creationId xmlns:a16="http://schemas.microsoft.com/office/drawing/2014/main" id="{9DB5D5F2-BE93-4B38-8E18-7A338F1530C8}"/>
+                </a:ext>
+              </a:extLst>
+            </p:cNvPr>
+            <p:cNvGrpSpPr/>
+            <p:nvPr/>
+          </p:nvGrpSpPr>
+          <p:grpSpPr>
+            <a:xfrm>
+              <a:off x="-11761" y="9267786"/>
+              <a:ext cx="6822809" cy="781737"/>
+              <a:chOff x="15364749" y="15235432"/>
+              <a:chExt cx="7017943" cy="804095"/>
+            </a:xfrm>
+          </p:grpSpPr>
+          <p:pic>
+            <p:nvPicPr>
+              <p:cNvPr id="63" name="Image 62">
+                <a:extLst>
+                  <a:ext uri="{FF2B5EF4-FFF2-40B4-BE49-F238E27FC236}">
+                    <a16:creationId xmlns:a16="http://schemas.microsoft.com/office/drawing/2014/main" id="{5816A04D-EB27-47AC-893D-9D5B65FBF4B9}"/>
+                  </a:ext>
+                </a:extLst>
+              </p:cNvPr>
+              <p:cNvPicPr>
+                <a:picLocks noChangeAspect="1"/>
+              </p:cNvPicPr>
+              <p:nvPr/>
+            </p:nvPicPr>
+            <p:blipFill rotWithShape="1">
+              <a:blip r:embed="rId15" cstate="print">
+                <a:extLst>
+                  <a:ext uri="{28A0092B-C50C-407E-A947-70E740481C1C}">
+                    <a14:useLocalDpi xmlns:a14="http://schemas.microsoft.com/office/drawing/2010/main" val="0"/>
+                  </a:ext>
+                </a:extLst>
+              </a:blip>
+              <a:srcRect l="19698" t="44126" r="17367" b="45674"/>
+              <a:stretch/>
+            </p:blipFill>
+            <p:spPr>
+              <a:xfrm>
+                <a:off x="15364749" y="15235432"/>
+                <a:ext cx="7017943" cy="804095"/>
+              </a:xfrm>
+              <a:prstGeom prst="rect">
+                <a:avLst/>
+              </a:prstGeom>
+            </p:spPr>
+          </p:pic>
+          <p:sp>
+            <p:nvSpPr>
+              <p:cNvPr id="64" name="ZoneTexte 63">
+                <a:extLst>
+                  <a:ext uri="{FF2B5EF4-FFF2-40B4-BE49-F238E27FC236}">
+                    <a16:creationId xmlns:a16="http://schemas.microsoft.com/office/drawing/2014/main" id="{15C506BC-D21C-4900-B8EA-0C0D852DBC1F}"/>
+                  </a:ext>
+                </a:extLst>
+              </p:cNvPr>
+              <p:cNvSpPr txBox="1"/>
+              <p:nvPr/>
+            </p:nvSpPr>
+            <p:spPr>
+              <a:xfrm>
+                <a:off x="16634207" y="15289166"/>
+                <a:ext cx="5258487" cy="410611"/>
+              </a:xfrm>
+              <a:prstGeom prst="rect">
+                <a:avLst/>
+              </a:prstGeom>
+              <a:solidFill>
+                <a:schemeClr val="bg1"/>
+              </a:solidFill>
+            </p:spPr>
+            <p:txBody>
+              <a:bodyPr wrap="square">
+                <a:spAutoFit/>
+              </a:bodyPr>
+              <a:lstStyle/>
+              <a:p>
+                <a:r>
+                  <a:rPr lang="fr-FR" sz="1600" b="1" dirty="0">
+                    <a:solidFill>
+                      <a:sysClr val="windowText" lastClr="000000"/>
+                    </a:solidFill>
+                    <a:latin typeface="Arial" panose="020B0604020202020204" pitchFamily="34" charset="0"/>
+                    <a:cs typeface="Arial" panose="020B0604020202020204" pitchFamily="34" charset="0"/>
+                  </a:rPr>
+                  <a:t>Line color: Association strength (cLift)</a:t>
+                </a:r>
+              </a:p>
+            </p:txBody>
+          </p:sp>
+        </p:grpSp>
+        <p:sp>
+          <p:nvSpPr>
+            <p:cNvPr id="65" name="ZoneTexte 64">
+              <a:extLst>
+                <a:ext uri="{FF2B5EF4-FFF2-40B4-BE49-F238E27FC236}">
+                  <a16:creationId xmlns:a16="http://schemas.microsoft.com/office/drawing/2014/main" id="{2A7AB20B-39D1-422B-86BE-4CF83D985DAB}"/>
+                </a:ext>
+              </a:extLst>
+            </p:cNvPr>
+            <p:cNvSpPr txBox="1"/>
+            <p:nvPr/>
+          </p:nvSpPr>
+          <p:spPr>
+            <a:xfrm>
+              <a:off x="1159456" y="10127417"/>
+              <a:ext cx="5112274" cy="399194"/>
+            </a:xfrm>
+            <a:prstGeom prst="rect">
+              <a:avLst/>
+            </a:prstGeom>
+            <a:solidFill>
+              <a:schemeClr val="bg1"/>
+            </a:solidFill>
+          </p:spPr>
+          <p:txBody>
+            <a:bodyPr wrap="square">
+              <a:spAutoFit/>
+            </a:bodyPr>
+            <a:lstStyle/>
+            <a:p>
+              <a:r>
+                <a:rPr lang="fr-FR" sz="1600" b="1" dirty="0">
+                  <a:solidFill>
+                    <a:sysClr val="windowText" lastClr="000000"/>
+                  </a:solidFill>
+                  <a:latin typeface="Arial" panose="020B0604020202020204" pitchFamily="34" charset="0"/>
+                  <a:cs typeface="Arial" panose="020B0604020202020204" pitchFamily="34" charset="0"/>
+                </a:rPr>
+                <a:t>Line width: Association frequency (eSup)</a:t>
+              </a:r>
+            </a:p>
+          </p:txBody>
+        </p:sp>
+        <p:sp>
+          <p:nvSpPr>
+            <p:cNvPr id="66" name="ZoneTexte 65">
+              <a:extLst>
+                <a:ext uri="{FF2B5EF4-FFF2-40B4-BE49-F238E27FC236}">
+                  <a16:creationId xmlns:a16="http://schemas.microsoft.com/office/drawing/2014/main" id="{25A5BC36-0C30-4EE0-975C-9556351853D5}"/>
+                </a:ext>
+              </a:extLst>
+            </p:cNvPr>
+            <p:cNvSpPr txBox="1"/>
+            <p:nvPr/>
+          </p:nvSpPr>
+          <p:spPr>
+            <a:xfrm>
+              <a:off x="8034701" y="10146970"/>
+              <a:ext cx="5112274" cy="399194"/>
+            </a:xfrm>
+            <a:prstGeom prst="rect">
+              <a:avLst/>
+            </a:prstGeom>
+            <a:solidFill>
+              <a:schemeClr val="bg1"/>
+            </a:solidFill>
+          </p:spPr>
+          <p:txBody>
+            <a:bodyPr wrap="square">
+              <a:spAutoFit/>
+            </a:bodyPr>
+            <a:lstStyle/>
+            <a:p>
+              <a:r>
+                <a:rPr lang="fr-FR" sz="1600" b="1" dirty="0">
+                  <a:solidFill>
+                    <a:sysClr val="windowText" lastClr="000000"/>
+                  </a:solidFill>
+                  <a:latin typeface="Arial" panose="020B0604020202020204" pitchFamily="34" charset="0"/>
+                  <a:cs typeface="Arial" panose="020B0604020202020204" pitchFamily="34" charset="0"/>
+                </a:rPr>
+                <a:t>Line width: Association frequency (eSup)</a:t>
+              </a:r>
+            </a:p>
+          </p:txBody>
+        </p:sp>
+        <p:sp>
+          <p:nvSpPr>
+            <p:cNvPr id="67" name="ZoneTexte 66">
+              <a:extLst>
+                <a:ext uri="{FF2B5EF4-FFF2-40B4-BE49-F238E27FC236}">
+                  <a16:creationId xmlns:a16="http://schemas.microsoft.com/office/drawing/2014/main" id="{D7D6C8C0-92D4-441B-9748-89700F8117FB}"/>
+                </a:ext>
+              </a:extLst>
+            </p:cNvPr>
+            <p:cNvSpPr txBox="1"/>
+            <p:nvPr/>
+          </p:nvSpPr>
+          <p:spPr>
+            <a:xfrm>
+              <a:off x="8156855" y="9308564"/>
+              <a:ext cx="5112274" cy="399194"/>
+            </a:xfrm>
+            <a:prstGeom prst="rect">
+              <a:avLst/>
+            </a:prstGeom>
+            <a:solidFill>
+              <a:schemeClr val="bg1"/>
+            </a:solidFill>
+          </p:spPr>
+          <p:txBody>
+            <a:bodyPr wrap="square">
+              <a:spAutoFit/>
+            </a:bodyPr>
+            <a:lstStyle/>
+            <a:p>
+              <a:r>
+                <a:rPr lang="fr-FR" sz="1600" b="1" dirty="0">
+                  <a:solidFill>
+                    <a:sysClr val="windowText" lastClr="000000"/>
+                  </a:solidFill>
+                  <a:latin typeface="Arial" panose="020B0604020202020204" pitchFamily="34" charset="0"/>
+                  <a:cs typeface="Arial" panose="020B0604020202020204" pitchFamily="34" charset="0"/>
+                </a:rPr>
+                <a:t>Line color: Association strength (cLift)</a:t>
+              </a:r>
+            </a:p>
+          </p:txBody>
+        </p:sp>
+      </p:grpSp>
+      <p:sp>
+        <p:nvSpPr>
+          <p:cNvPr id="69" name="ZoneTexte 68">
+            <a:extLst>
+              <a:ext uri="{FF2B5EF4-FFF2-40B4-BE49-F238E27FC236}">
+                <a16:creationId xmlns:a16="http://schemas.microsoft.com/office/drawing/2014/main" id="{15635CDA-79CD-4128-BD98-C712DF1E668E}"/>
+              </a:ext>
+            </a:extLst>
+          </p:cNvPr>
+          <p:cNvSpPr txBox="1"/>
+          <p:nvPr/>
+        </p:nvSpPr>
+        <p:spPr>
+          <a:xfrm>
+            <a:off x="926713" y="3465850"/>
+            <a:ext cx="1890724" cy="307777"/>
+          </a:xfrm>
+          <a:prstGeom prst="rect">
+            <a:avLst/>
+          </a:prstGeom>
+          <a:noFill/>
+        </p:spPr>
+        <p:txBody>
+          <a:bodyPr rot="0" spcFirstLastPara="0" vertOverflow="overflow" horzOverflow="overflow" vert="horz" wrap="square" lIns="91440" tIns="45720" rIns="91440" bIns="45720" numCol="1" spcCol="0" rtlCol="0" fromWordArt="0" anchor="t" anchorCtr="0" forceAA="0" compatLnSpc="1">
+            <a:prstTxWarp prst="textNoShape">
+              <a:avLst/>
+            </a:prstTxWarp>
+            <a:spAutoFit/>
+          </a:bodyPr>
+          <a:lstStyle/>
+          <a:p>
+            <a:pPr algn="ctr"/>
+            <a:r>
+              <a:rPr lang="fr-FR" sz="1400" dirty="0">
+                <a:latin typeface="Arial"/>
+                <a:cs typeface="Arial"/>
+              </a:rPr>
+              <a:t>0.238 [0.234; 0.249]</a:t>
+            </a:r>
+            <a:endParaRPr lang="fr-FR" sz="1400" dirty="0"/>
+          </a:p>
+        </p:txBody>
+      </p:sp>
+      <p:sp>
+        <p:nvSpPr>
+          <p:cNvPr id="70" name="ZoneTexte 69">
+            <a:extLst>
+              <a:ext uri="{FF2B5EF4-FFF2-40B4-BE49-F238E27FC236}">
+                <a16:creationId xmlns:a16="http://schemas.microsoft.com/office/drawing/2014/main" id="{58A6FB0F-15EE-4CD0-8822-CC709A21152D}"/>
+              </a:ext>
+            </a:extLst>
+          </p:cNvPr>
+          <p:cNvSpPr txBox="1"/>
+          <p:nvPr/>
+        </p:nvSpPr>
+        <p:spPr>
+          <a:xfrm>
+            <a:off x="3245678" y="3465850"/>
+            <a:ext cx="1890724" cy="307777"/>
+          </a:xfrm>
+          <a:prstGeom prst="rect">
+            <a:avLst/>
+          </a:prstGeom>
+          <a:noFill/>
+        </p:spPr>
+        <p:txBody>
+          <a:bodyPr rot="0" spcFirstLastPara="0" vertOverflow="overflow" horzOverflow="overflow" vert="horz" wrap="square" lIns="91440" tIns="45720" rIns="91440" bIns="45720" numCol="1" spcCol="0" rtlCol="0" fromWordArt="0" anchor="t" anchorCtr="0" forceAA="0" compatLnSpc="1">
+            <a:prstTxWarp prst="textNoShape">
+              <a:avLst/>
+            </a:prstTxWarp>
+            <a:spAutoFit/>
+          </a:bodyPr>
+          <a:lstStyle/>
+          <a:p>
+            <a:pPr algn="ctr"/>
+            <a:r>
+              <a:rPr lang="fr-FR" sz="1400" dirty="0">
+                <a:latin typeface="Arial"/>
+                <a:cs typeface="Arial"/>
+              </a:rPr>
+              <a:t>0.285 [0.283; 0.285]</a:t>
+            </a:r>
+            <a:endParaRPr lang="fr-FR" sz="1400" dirty="0"/>
+          </a:p>
+        </p:txBody>
+      </p:sp>
+      <p:sp>
+        <p:nvSpPr>
+          <p:cNvPr id="71" name="ZoneTexte 70">
+            <a:extLst>
+              <a:ext uri="{FF2B5EF4-FFF2-40B4-BE49-F238E27FC236}">
+                <a16:creationId xmlns:a16="http://schemas.microsoft.com/office/drawing/2014/main" id="{3A973B18-0FFA-43EC-B6BE-554171350E5E}"/>
+              </a:ext>
+            </a:extLst>
+          </p:cNvPr>
+          <p:cNvSpPr txBox="1"/>
+          <p:nvPr/>
+        </p:nvSpPr>
+        <p:spPr>
+          <a:xfrm>
+            <a:off x="5564643" y="3465850"/>
+            <a:ext cx="1890724" cy="307777"/>
+          </a:xfrm>
+          <a:prstGeom prst="rect">
+            <a:avLst/>
+          </a:prstGeom>
+          <a:noFill/>
+        </p:spPr>
+        <p:txBody>
+          <a:bodyPr rot="0" spcFirstLastPara="0" vertOverflow="overflow" horzOverflow="overflow" vert="horz" wrap="square" lIns="91440" tIns="45720" rIns="91440" bIns="45720" numCol="1" spcCol="0" rtlCol="0" fromWordArt="0" anchor="t" anchorCtr="0" forceAA="0" compatLnSpc="1">
+            <a:prstTxWarp prst="textNoShape">
+              <a:avLst/>
+            </a:prstTxWarp>
+            <a:spAutoFit/>
+          </a:bodyPr>
+          <a:lstStyle/>
+          <a:p>
+            <a:pPr algn="ctr"/>
+            <a:r>
+              <a:rPr lang="fr-FR" sz="1400" dirty="0">
+                <a:latin typeface="Arial"/>
+                <a:cs typeface="Arial"/>
+              </a:rPr>
+              <a:t>0.281 [0.266; 0.290]</a:t>
+            </a:r>
+            <a:endParaRPr lang="fr-FR" sz="1400" dirty="0"/>
+          </a:p>
+        </p:txBody>
+      </p:sp>
+      <p:sp>
+        <p:nvSpPr>
+          <p:cNvPr id="72" name="ZoneTexte 71">
+            <a:extLst>
+              <a:ext uri="{FF2B5EF4-FFF2-40B4-BE49-F238E27FC236}">
+                <a16:creationId xmlns:a16="http://schemas.microsoft.com/office/drawing/2014/main" id="{D00EBF65-3F78-4447-9995-B8B58AC167EE}"/>
+              </a:ext>
+            </a:extLst>
+          </p:cNvPr>
+          <p:cNvSpPr txBox="1"/>
+          <p:nvPr/>
+        </p:nvSpPr>
+        <p:spPr>
+          <a:xfrm>
+            <a:off x="7883608" y="3465850"/>
+            <a:ext cx="1890724" cy="307777"/>
+          </a:xfrm>
+          <a:prstGeom prst="rect">
+            <a:avLst/>
+          </a:prstGeom>
+          <a:noFill/>
+        </p:spPr>
+        <p:txBody>
+          <a:bodyPr rot="0" spcFirstLastPara="0" vertOverflow="overflow" horzOverflow="overflow" vert="horz" wrap="square" lIns="91440" tIns="45720" rIns="91440" bIns="45720" numCol="1" spcCol="0" rtlCol="0" fromWordArt="0" anchor="t" anchorCtr="0" forceAA="0" compatLnSpc="1">
+            <a:prstTxWarp prst="textNoShape">
+              <a:avLst/>
+            </a:prstTxWarp>
+            <a:spAutoFit/>
+          </a:bodyPr>
+          <a:lstStyle/>
+          <a:p>
+            <a:pPr algn="ctr"/>
+            <a:r>
+              <a:rPr lang="fr-FR" sz="1400" dirty="0">
+                <a:latin typeface="Arial"/>
+                <a:cs typeface="Arial"/>
+              </a:rPr>
+              <a:t>0.292 [0.288; 0.293]</a:t>
+            </a:r>
+            <a:endParaRPr lang="fr-FR" sz="1400" dirty="0"/>
+          </a:p>
+        </p:txBody>
+      </p:sp>
+      <p:sp>
+        <p:nvSpPr>
+          <p:cNvPr id="73" name="ZoneTexte 72">
+            <a:extLst>
+              <a:ext uri="{FF2B5EF4-FFF2-40B4-BE49-F238E27FC236}">
+                <a16:creationId xmlns:a16="http://schemas.microsoft.com/office/drawing/2014/main" id="{C41992D7-8A53-4E65-A8F5-627178D0FB06}"/>
+              </a:ext>
+            </a:extLst>
+          </p:cNvPr>
+          <p:cNvSpPr txBox="1"/>
+          <p:nvPr/>
+        </p:nvSpPr>
+        <p:spPr>
+          <a:xfrm>
+            <a:off x="10202575" y="3465850"/>
+            <a:ext cx="1890724" cy="307777"/>
+          </a:xfrm>
+          <a:prstGeom prst="rect">
+            <a:avLst/>
+          </a:prstGeom>
+          <a:noFill/>
+        </p:spPr>
+        <p:txBody>
+          <a:bodyPr rot="0" spcFirstLastPara="0" vertOverflow="overflow" horzOverflow="overflow" vert="horz" wrap="square" lIns="91440" tIns="45720" rIns="91440" bIns="45720" numCol="1" spcCol="0" rtlCol="0" fromWordArt="0" anchor="t" anchorCtr="0" forceAA="0" compatLnSpc="1">
+            <a:prstTxWarp prst="textNoShape">
+              <a:avLst/>
+            </a:prstTxWarp>
+            <a:spAutoFit/>
+          </a:bodyPr>
+          <a:lstStyle/>
+          <a:p>
+            <a:pPr algn="ctr"/>
+            <a:r>
+              <a:rPr lang="fr-FR" sz="1400" dirty="0">
+                <a:latin typeface="Arial"/>
+                <a:cs typeface="Arial"/>
+              </a:rPr>
+              <a:t>0.301 [0.294; 0.302]</a:t>
+            </a:r>
+            <a:endParaRPr lang="fr-FR" sz="1400" dirty="0"/>
+          </a:p>
+        </p:txBody>
+      </p:sp>
+      <p:sp>
+        <p:nvSpPr>
+          <p:cNvPr id="74" name="ZoneTexte 73">
+            <a:extLst>
+              <a:ext uri="{FF2B5EF4-FFF2-40B4-BE49-F238E27FC236}">
+                <a16:creationId xmlns:a16="http://schemas.microsoft.com/office/drawing/2014/main" id="{8E309D44-0DC3-4F87-848D-4C03EB0BB267}"/>
+              </a:ext>
+            </a:extLst>
+          </p:cNvPr>
+          <p:cNvSpPr txBox="1"/>
+          <p:nvPr/>
+        </p:nvSpPr>
+        <p:spPr>
+          <a:xfrm>
+            <a:off x="-3914" y="6460529"/>
+            <a:ext cx="876300" cy="307777"/>
+          </a:xfrm>
+          <a:prstGeom prst="rect">
+            <a:avLst/>
+          </a:prstGeom>
+          <a:noFill/>
+        </p:spPr>
+        <p:txBody>
+          <a:bodyPr rot="0" spcFirstLastPara="0" vertOverflow="overflow" horzOverflow="overflow" vert="horz" wrap="square" lIns="91440" tIns="45720" rIns="91440" bIns="45720" numCol="1" spcCol="0" rtlCol="0" fromWordArt="0" anchor="t" anchorCtr="0" forceAA="0" compatLnSpc="1">
+            <a:prstTxWarp prst="textNoShape">
+              <a:avLst/>
+            </a:prstTxWarp>
+            <a:spAutoFit/>
+          </a:bodyPr>
+          <a:lstStyle/>
+          <a:p>
+            <a:r>
+              <a:rPr lang="fr-FR" sz="1400" dirty="0">
+                <a:latin typeface="Arial"/>
+                <a:cs typeface="Arial"/>
+              </a:rPr>
+              <a:t>Density</a:t>
+            </a:r>
+            <a:endParaRPr lang="fr-FR" sz="1400" dirty="0"/>
+          </a:p>
+        </p:txBody>
+      </p:sp>
+      <p:sp>
+        <p:nvSpPr>
+          <p:cNvPr id="75" name="ZoneTexte 74">
+            <a:extLst>
+              <a:ext uri="{FF2B5EF4-FFF2-40B4-BE49-F238E27FC236}">
+                <a16:creationId xmlns:a16="http://schemas.microsoft.com/office/drawing/2014/main" id="{001893B2-14A6-4F5A-8DD5-5C9188E58DA7}"/>
+              </a:ext>
+            </a:extLst>
+          </p:cNvPr>
+          <p:cNvSpPr txBox="1"/>
+          <p:nvPr/>
+        </p:nvSpPr>
+        <p:spPr>
+          <a:xfrm>
+            <a:off x="926713" y="6460529"/>
+            <a:ext cx="1890724" cy="307777"/>
+          </a:xfrm>
+          <a:prstGeom prst="rect">
+            <a:avLst/>
+          </a:prstGeom>
+          <a:noFill/>
+        </p:spPr>
+        <p:txBody>
+          <a:bodyPr rot="0" spcFirstLastPara="0" vertOverflow="overflow" horzOverflow="overflow" vert="horz" wrap="square" lIns="91440" tIns="45720" rIns="91440" bIns="45720" numCol="1" spcCol="0" rtlCol="0" fromWordArt="0" anchor="t" anchorCtr="0" forceAA="0" compatLnSpc="1">
+            <a:prstTxWarp prst="textNoShape">
+              <a:avLst/>
+            </a:prstTxWarp>
+            <a:spAutoFit/>
+          </a:bodyPr>
+          <a:lstStyle/>
+          <a:p>
+            <a:pPr algn="ctr"/>
+            <a:r>
+              <a:rPr lang="fr-FR" sz="1400" dirty="0">
+                <a:latin typeface="Arial"/>
+                <a:cs typeface="Arial"/>
+              </a:rPr>
+              <a:t>0.074 [0.074; 0.074]</a:t>
+            </a:r>
+            <a:endParaRPr lang="fr-FR" sz="1400" dirty="0"/>
+          </a:p>
+        </p:txBody>
+      </p:sp>
+      <p:sp>
+        <p:nvSpPr>
+          <p:cNvPr id="76" name="ZoneTexte 75">
+            <a:extLst>
+              <a:ext uri="{FF2B5EF4-FFF2-40B4-BE49-F238E27FC236}">
+                <a16:creationId xmlns:a16="http://schemas.microsoft.com/office/drawing/2014/main" id="{1A49BAF5-8B7D-4E1F-A950-828DFF82E714}"/>
+              </a:ext>
+            </a:extLst>
+          </p:cNvPr>
+          <p:cNvSpPr txBox="1"/>
+          <p:nvPr/>
+        </p:nvSpPr>
+        <p:spPr>
+          <a:xfrm>
+            <a:off x="3245678" y="6460529"/>
+            <a:ext cx="1890724" cy="307777"/>
+          </a:xfrm>
+          <a:prstGeom prst="rect">
+            <a:avLst/>
+          </a:prstGeom>
+          <a:noFill/>
+        </p:spPr>
+        <p:txBody>
+          <a:bodyPr rot="0" spcFirstLastPara="0" vertOverflow="overflow" horzOverflow="overflow" vert="horz" wrap="square" lIns="91440" tIns="45720" rIns="91440" bIns="45720" numCol="1" spcCol="0" rtlCol="0" fromWordArt="0" anchor="t" anchorCtr="0" forceAA="0" compatLnSpc="1">
+            <a:prstTxWarp prst="textNoShape">
+              <a:avLst/>
+            </a:prstTxWarp>
+            <a:spAutoFit/>
+          </a:bodyPr>
+          <a:lstStyle/>
+          <a:p>
+            <a:pPr algn="ctr"/>
+            <a:r>
+              <a:rPr lang="fr-FR" sz="1400" dirty="0">
+                <a:latin typeface="Arial"/>
+                <a:cs typeface="Arial"/>
+              </a:rPr>
+              <a:t>0.091 [0.091; 0.091]</a:t>
+            </a:r>
+            <a:endParaRPr lang="fr-FR" sz="1400" dirty="0"/>
+          </a:p>
+        </p:txBody>
+      </p:sp>
+      <p:sp>
+        <p:nvSpPr>
+          <p:cNvPr id="77" name="ZoneTexte 76">
+            <a:extLst>
+              <a:ext uri="{FF2B5EF4-FFF2-40B4-BE49-F238E27FC236}">
+                <a16:creationId xmlns:a16="http://schemas.microsoft.com/office/drawing/2014/main" id="{8E6C76AB-68C8-4140-AFE1-9E31ED8BDD7D}"/>
+              </a:ext>
+            </a:extLst>
+          </p:cNvPr>
+          <p:cNvSpPr txBox="1"/>
+          <p:nvPr/>
+        </p:nvSpPr>
+        <p:spPr>
+          <a:xfrm>
+            <a:off x="5564643" y="6460529"/>
+            <a:ext cx="1890724" cy="307777"/>
+          </a:xfrm>
+          <a:prstGeom prst="rect">
+            <a:avLst/>
+          </a:prstGeom>
+          <a:noFill/>
+        </p:spPr>
+        <p:txBody>
+          <a:bodyPr rot="0" spcFirstLastPara="0" vertOverflow="overflow" horzOverflow="overflow" vert="horz" wrap="square" lIns="91440" tIns="45720" rIns="91440" bIns="45720" numCol="1" spcCol="0" rtlCol="0" fromWordArt="0" anchor="t" anchorCtr="0" forceAA="0" compatLnSpc="1">
+            <a:prstTxWarp prst="textNoShape">
+              <a:avLst/>
+            </a:prstTxWarp>
+            <a:spAutoFit/>
+          </a:bodyPr>
+          <a:lstStyle/>
+          <a:p>
+            <a:pPr algn="ctr"/>
+            <a:r>
+              <a:rPr lang="fr-FR" sz="1400" dirty="0">
+                <a:latin typeface="Arial"/>
+                <a:cs typeface="Arial"/>
+              </a:rPr>
+              <a:t>0.088 [0.088; 0.088]</a:t>
+            </a:r>
+            <a:endParaRPr lang="fr-FR" sz="1400" dirty="0"/>
+          </a:p>
+        </p:txBody>
+      </p:sp>
+      <p:sp>
+        <p:nvSpPr>
+          <p:cNvPr id="78" name="ZoneTexte 77">
+            <a:extLst>
+              <a:ext uri="{FF2B5EF4-FFF2-40B4-BE49-F238E27FC236}">
+                <a16:creationId xmlns:a16="http://schemas.microsoft.com/office/drawing/2014/main" id="{922EBDBE-E1BE-4FB3-BE78-7E0C6B435E0C}"/>
+              </a:ext>
+            </a:extLst>
+          </p:cNvPr>
+          <p:cNvSpPr txBox="1"/>
+          <p:nvPr/>
+        </p:nvSpPr>
+        <p:spPr>
+          <a:xfrm>
+            <a:off x="7883608" y="6460529"/>
+            <a:ext cx="1890724" cy="307777"/>
+          </a:xfrm>
+          <a:prstGeom prst="rect">
+            <a:avLst/>
+          </a:prstGeom>
+          <a:noFill/>
+        </p:spPr>
+        <p:txBody>
+          <a:bodyPr rot="0" spcFirstLastPara="0" vertOverflow="overflow" horzOverflow="overflow" vert="horz" wrap="square" lIns="91440" tIns="45720" rIns="91440" bIns="45720" numCol="1" spcCol="0" rtlCol="0" fromWordArt="0" anchor="t" anchorCtr="0" forceAA="0" compatLnSpc="1">
+            <a:prstTxWarp prst="textNoShape">
+              <a:avLst/>
+            </a:prstTxWarp>
+            <a:spAutoFit/>
+          </a:bodyPr>
+          <a:lstStyle/>
+          <a:p>
+            <a:pPr algn="ctr"/>
+            <a:r>
+              <a:rPr lang="fr-FR" sz="1400" dirty="0">
+                <a:latin typeface="Arial"/>
+                <a:cs typeface="Arial"/>
+              </a:rPr>
+              <a:t>0.097 [0.097; 0.097]</a:t>
+            </a:r>
+            <a:endParaRPr lang="fr-FR" sz="1400" dirty="0"/>
+          </a:p>
+        </p:txBody>
+      </p:sp>
+      <p:sp>
+        <p:nvSpPr>
+          <p:cNvPr id="79" name="ZoneTexte 78">
+            <a:extLst>
+              <a:ext uri="{FF2B5EF4-FFF2-40B4-BE49-F238E27FC236}">
+                <a16:creationId xmlns:a16="http://schemas.microsoft.com/office/drawing/2014/main" id="{02A29C46-FC59-4F35-BF79-E73BCEB1BB26}"/>
+              </a:ext>
+            </a:extLst>
+          </p:cNvPr>
+          <p:cNvSpPr txBox="1"/>
+          <p:nvPr/>
+        </p:nvSpPr>
+        <p:spPr>
+          <a:xfrm>
+            <a:off x="10202575" y="6460529"/>
+            <a:ext cx="1890724" cy="307777"/>
+          </a:xfrm>
+          <a:prstGeom prst="rect">
+            <a:avLst/>
+          </a:prstGeom>
+          <a:noFill/>
+        </p:spPr>
+        <p:txBody>
+          <a:bodyPr rot="0" spcFirstLastPara="0" vertOverflow="overflow" horzOverflow="overflow" vert="horz" wrap="square" lIns="91440" tIns="45720" rIns="91440" bIns="45720" numCol="1" spcCol="0" rtlCol="0" fromWordArt="0" anchor="t" anchorCtr="0" forceAA="0" compatLnSpc="1">
+            <a:prstTxWarp prst="textNoShape">
+              <a:avLst/>
+            </a:prstTxWarp>
+            <a:spAutoFit/>
+          </a:bodyPr>
+          <a:lstStyle/>
+          <a:p>
+            <a:pPr algn="ctr"/>
+            <a:r>
+              <a:rPr lang="fr-FR" sz="1400" dirty="0">
+                <a:latin typeface="Arial"/>
+                <a:cs typeface="Arial"/>
+              </a:rPr>
+              <a:t>0.100 [0.100; 0.103]</a:t>
+            </a:r>
+            <a:endParaRPr lang="fr-FR" sz="1400" dirty="0"/>
+          </a:p>
+        </p:txBody>
+      </p:sp>
+    </p:spTree>
+    <p:extLst>
+      <p:ext uri="{BB962C8B-B14F-4D97-AF65-F5344CB8AC3E}">
+        <p14:creationId xmlns:p14="http://schemas.microsoft.com/office/powerpoint/2010/main" val="2220666966"/>
+      </p:ext>
+    </p:extLst>
+  </p:cSld>
+  <p:clrMapOvr>
+    <a:masterClrMapping/>
+  </p:clrMapOvr>
+</p:sld>
+</file>
+
+<file path=ppt/slides/slide3.xml><?xml version="1.0" encoding="utf-8"?>
+<p:sld xmlns:a="http://schemas.openxmlformats.org/drawingml/2006/main" xmlns:r="http://schemas.openxmlformats.org/officeDocument/2006/relationships" xmlns:p="http://schemas.openxmlformats.org/presentationml/2006/main">
+  <p:cSld>
+    <p:spTree>
+      <p:nvGrpSpPr>
+        <p:cNvPr id="1" name=""/>
+        <p:cNvGrpSpPr/>
+        <p:nvPr/>
+      </p:nvGrpSpPr>
+      <p:grpSpPr>
+        <a:xfrm>
+          <a:off x="0" y="0"/>
+          <a:ext cx="0" cy="0"/>
+          <a:chOff x="0" y="0"/>
+          <a:chExt cx="0" cy="0"/>
+        </a:xfrm>
+      </p:grpSpPr>
       <p:pic>
         <p:nvPicPr>
           <p:cNvPr id="4" name="Image 3">
@@ -6963,7 +10185,7 @@
 </p:sld>
 </file>
 
-<file path=ppt/slides/slide3.xml><?xml version="1.0" encoding="utf-8"?>
+<file path=ppt/slides/slide4.xml><?xml version="1.0" encoding="utf-8"?>
 <p:sld xmlns:a="http://schemas.openxmlformats.org/drawingml/2006/main" xmlns:r="http://schemas.openxmlformats.org/officeDocument/2006/relationships" xmlns:p="http://schemas.openxmlformats.org/presentationml/2006/main">
   <p:cSld>
     <p:spTree>
@@ -8465,7 +11687,7 @@
 </p:sld>
 </file>
 
-<file path=ppt/slides/slide4.xml><?xml version="1.0" encoding="utf-8"?>
+<file path=ppt/slides/slide5.xml><?xml version="1.0" encoding="utf-8"?>
 <p:sld xmlns:a="http://schemas.openxmlformats.org/drawingml/2006/main" xmlns:r="http://schemas.openxmlformats.org/officeDocument/2006/relationships" xmlns:p="http://schemas.openxmlformats.org/presentationml/2006/main">
   <p:cSld>
     <p:spTree>
@@ -9205,7 +12427,7 @@
 </p:sld>
 </file>
 
-<file path=ppt/slides/slide5.xml><?xml version="1.0" encoding="utf-8"?>
+<file path=ppt/slides/slide6.xml><?xml version="1.0" encoding="utf-8"?>
 <p:sld xmlns:a="http://schemas.openxmlformats.org/drawingml/2006/main" xmlns:r="http://schemas.openxmlformats.org/officeDocument/2006/relationships" xmlns:p="http://schemas.openxmlformats.org/presentationml/2006/main">
   <p:cSld>
     <p:spTree>
